--- a/slides/09-persuasive-vis.pptx
+++ b/slides/09-persuasive-vis.pptx
@@ -5,32 +5,34 @@
     <p:sldMasterId id="2147483852" r:id="rId1"/>
   </p:sldMasterIdLst>
   <p:notesMasterIdLst>
-    <p:notesMasterId r:id="rId25"/>
+    <p:notesMasterId r:id="rId27"/>
   </p:notesMasterIdLst>
   <p:sldIdLst>
     <p:sldId id="256" r:id="rId2"/>
-    <p:sldId id="257" r:id="rId3"/>
-    <p:sldId id="258" r:id="rId4"/>
-    <p:sldId id="259" r:id="rId5"/>
-    <p:sldId id="260" r:id="rId6"/>
-    <p:sldId id="268" r:id="rId7"/>
-    <p:sldId id="270" r:id="rId8"/>
-    <p:sldId id="271" r:id="rId9"/>
-    <p:sldId id="277" r:id="rId10"/>
-    <p:sldId id="278" r:id="rId11"/>
-    <p:sldId id="279" r:id="rId12"/>
-    <p:sldId id="282" r:id="rId13"/>
-    <p:sldId id="281" r:id="rId14"/>
-    <p:sldId id="283" r:id="rId15"/>
-    <p:sldId id="280" r:id="rId16"/>
-    <p:sldId id="276" r:id="rId17"/>
-    <p:sldId id="284" r:id="rId18"/>
-    <p:sldId id="286" r:id="rId19"/>
-    <p:sldId id="265" r:id="rId20"/>
-    <p:sldId id="266" r:id="rId21"/>
-    <p:sldId id="267" r:id="rId22"/>
-    <p:sldId id="264" r:id="rId23"/>
-    <p:sldId id="261" r:id="rId24"/>
+    <p:sldId id="287" r:id="rId3"/>
+    <p:sldId id="288" r:id="rId4"/>
+    <p:sldId id="257" r:id="rId5"/>
+    <p:sldId id="258" r:id="rId6"/>
+    <p:sldId id="259" r:id="rId7"/>
+    <p:sldId id="260" r:id="rId8"/>
+    <p:sldId id="268" r:id="rId9"/>
+    <p:sldId id="270" r:id="rId10"/>
+    <p:sldId id="271" r:id="rId11"/>
+    <p:sldId id="277" r:id="rId12"/>
+    <p:sldId id="278" r:id="rId13"/>
+    <p:sldId id="279" r:id="rId14"/>
+    <p:sldId id="282" r:id="rId15"/>
+    <p:sldId id="281" r:id="rId16"/>
+    <p:sldId id="283" r:id="rId17"/>
+    <p:sldId id="280" r:id="rId18"/>
+    <p:sldId id="276" r:id="rId19"/>
+    <p:sldId id="284" r:id="rId20"/>
+    <p:sldId id="286" r:id="rId21"/>
+    <p:sldId id="265" r:id="rId22"/>
+    <p:sldId id="266" r:id="rId23"/>
+    <p:sldId id="267" r:id="rId24"/>
+    <p:sldId id="264" r:id="rId25"/>
+    <p:sldId id="261" r:id="rId26"/>
   </p:sldIdLst>
   <p:sldSz cx="12192000" cy="6858000"/>
   <p:notesSz cx="6858000" cy="9144000"/>
@@ -219,7 +221,7 @@
           <a:p>
             <a:fld id="{3CBB8A52-8AC5-C74C-97FB-632C448F3674}" type="datetimeFigureOut">
               <a:rPr lang="en-US" smtClean="0"/>
-              <a:t>9/10/26</a:t>
+              <a:t>9/30/26</a:t>
             </a:fld>
             <a:endParaRPr lang="en-US"/>
           </a:p>
@@ -554,7 +556,7 @@
           <a:p>
             <a:fld id="{E666506D-5C9B-294C-B2AE-15ACE8B5B9F7}" type="slidenum">
               <a:rPr lang="en-US" smtClean="0"/>
-              <a:t>6</a:t>
+              <a:t>8</a:t>
             </a:fld>
             <a:endParaRPr lang="en-US"/>
           </a:p>
@@ -665,7 +667,7 @@
           <a:p>
             <a:fld id="{E666506D-5C9B-294C-B2AE-15ACE8B5B9F7}" type="slidenum">
               <a:rPr lang="en-US" smtClean="0"/>
-              <a:t>15</a:t>
+              <a:t>17</a:t>
             </a:fld>
             <a:endParaRPr lang="en-US"/>
           </a:p>
@@ -788,7 +790,7 @@
           <a:p>
             <a:fld id="{E666506D-5C9B-294C-B2AE-15ACE8B5B9F7}" type="slidenum">
               <a:rPr lang="en-US" smtClean="0"/>
-              <a:t>16</a:t>
+              <a:t>18</a:t>
             </a:fld>
             <a:endParaRPr lang="en-US"/>
           </a:p>
@@ -913,7 +915,7 @@
           <a:p>
             <a:fld id="{E666506D-5C9B-294C-B2AE-15ACE8B5B9F7}" type="slidenum">
               <a:rPr lang="en-US" smtClean="0"/>
-              <a:t>17</a:t>
+              <a:t>19</a:t>
             </a:fld>
             <a:endParaRPr lang="en-US"/>
           </a:p>
@@ -1087,7 +1089,7 @@
           <a:p>
             <a:fld id="{E666506D-5C9B-294C-B2AE-15ACE8B5B9F7}" type="slidenum">
               <a:rPr lang="en-US" smtClean="0"/>
-              <a:t>18</a:t>
+              <a:t>20</a:t>
             </a:fld>
             <a:endParaRPr lang="en-US"/>
           </a:p>
@@ -1237,7 +1239,7 @@
           <a:p>
             <a:fld id="{E666506D-5C9B-294C-B2AE-15ACE8B5B9F7}" type="slidenum">
               <a:rPr lang="en-US" smtClean="0"/>
-              <a:t>19</a:t>
+              <a:t>21</a:t>
             </a:fld>
             <a:endParaRPr lang="en-US"/>
           </a:p>
@@ -1324,7 +1326,7 @@
           <a:p>
             <a:fld id="{E666506D-5C9B-294C-B2AE-15ACE8B5B9F7}" type="slidenum">
               <a:rPr lang="en-US" smtClean="0"/>
-              <a:t>20</a:t>
+              <a:t>22</a:t>
             </a:fld>
             <a:endParaRPr lang="en-US"/>
           </a:p>
@@ -1457,7 +1459,7 @@
           <a:p>
             <a:fld id="{E666506D-5C9B-294C-B2AE-15ACE8B5B9F7}" type="slidenum">
               <a:rPr lang="en-US" smtClean="0"/>
-              <a:t>21</a:t>
+              <a:t>23</a:t>
             </a:fld>
             <a:endParaRPr lang="en-US"/>
           </a:p>
@@ -1544,7 +1546,7 @@
           <a:p>
             <a:fld id="{E666506D-5C9B-294C-B2AE-15ACE8B5B9F7}" type="slidenum">
               <a:rPr lang="en-US" smtClean="0"/>
-              <a:t>22</a:t>
+              <a:t>24</a:t>
             </a:fld>
             <a:endParaRPr lang="en-US"/>
           </a:p>
@@ -1655,7 +1657,7 @@
           <a:p>
             <a:fld id="{E666506D-5C9B-294C-B2AE-15ACE8B5B9F7}" type="slidenum">
               <a:rPr lang="en-US" smtClean="0"/>
-              <a:t>7</a:t>
+              <a:t>9</a:t>
             </a:fld>
             <a:endParaRPr lang="en-US"/>
           </a:p>
@@ -1902,7 +1904,7 @@
           <a:p>
             <a:fld id="{E666506D-5C9B-294C-B2AE-15ACE8B5B9F7}" type="slidenum">
               <a:rPr lang="en-US" smtClean="0"/>
-              <a:t>8</a:t>
+              <a:t>10</a:t>
             </a:fld>
             <a:endParaRPr lang="en-US"/>
           </a:p>
@@ -2010,7 +2012,7 @@
           <a:p>
             <a:fld id="{E666506D-5C9B-294C-B2AE-15ACE8B5B9F7}" type="slidenum">
               <a:rPr lang="en-US" smtClean="0"/>
-              <a:t>9</a:t>
+              <a:t>11</a:t>
             </a:fld>
             <a:endParaRPr lang="en-US"/>
           </a:p>
@@ -2121,7 +2123,7 @@
           <a:p>
             <a:fld id="{E666506D-5C9B-294C-B2AE-15ACE8B5B9F7}" type="slidenum">
               <a:rPr lang="en-US" smtClean="0"/>
-              <a:t>10</a:t>
+              <a:t>12</a:t>
             </a:fld>
             <a:endParaRPr lang="en-US"/>
           </a:p>
@@ -2232,7 +2234,7 @@
           <a:p>
             <a:fld id="{E666506D-5C9B-294C-B2AE-15ACE8B5B9F7}" type="slidenum">
               <a:rPr lang="en-US" smtClean="0"/>
-              <a:t>11</a:t>
+              <a:t>13</a:t>
             </a:fld>
             <a:endParaRPr lang="en-US"/>
           </a:p>
@@ -2343,7 +2345,7 @@
           <a:p>
             <a:fld id="{E666506D-5C9B-294C-B2AE-15ACE8B5B9F7}" type="slidenum">
               <a:rPr lang="en-US" smtClean="0"/>
-              <a:t>12</a:t>
+              <a:t>14</a:t>
             </a:fld>
             <a:endParaRPr lang="en-US"/>
           </a:p>
@@ -2451,7 +2453,7 @@
           <a:p>
             <a:fld id="{E666506D-5C9B-294C-B2AE-15ACE8B5B9F7}" type="slidenum">
               <a:rPr lang="en-US" smtClean="0"/>
-              <a:t>13</a:t>
+              <a:t>15</a:t>
             </a:fld>
             <a:endParaRPr lang="en-US"/>
           </a:p>
@@ -2559,7 +2561,7 @@
           <a:p>
             <a:fld id="{E666506D-5C9B-294C-B2AE-15ACE8B5B9F7}" type="slidenum">
               <a:rPr lang="en-US" smtClean="0"/>
-              <a:t>14</a:t>
+              <a:t>16</a:t>
             </a:fld>
             <a:endParaRPr lang="en-US"/>
           </a:p>
@@ -2817,7 +2819,7 @@
             <a:fld id="{5586B75A-687E-405C-8A0B-8D00578BA2C3}" type="datetimeFigureOut">
               <a:rPr lang="en-US" smtClean="0"/>
               <a:pPr/>
-              <a:t>9/10/26</a:t>
+              <a:t>9/30/26</a:t>
             </a:fld>
             <a:endParaRPr lang="en-US" dirty="0"/>
           </a:p>
@@ -2989,7 +2991,7 @@
             <a:fld id="{5586B75A-687E-405C-8A0B-8D00578BA2C3}" type="datetimeFigureOut">
               <a:rPr lang="en-US" smtClean="0"/>
               <a:pPr/>
-              <a:t>9/10/26</a:t>
+              <a:t>9/30/26</a:t>
             </a:fld>
             <a:endParaRPr lang="en-US" dirty="0"/>
           </a:p>
@@ -3171,7 +3173,7 @@
             <a:fld id="{5586B75A-687E-405C-8A0B-8D00578BA2C3}" type="datetimeFigureOut">
               <a:rPr lang="en-US" smtClean="0"/>
               <a:pPr/>
-              <a:t>9/10/26</a:t>
+              <a:t>9/30/26</a:t>
             </a:fld>
             <a:endParaRPr lang="en-US" dirty="0"/>
           </a:p>
@@ -3343,7 +3345,7 @@
             <a:fld id="{5586B75A-687E-405C-8A0B-8D00578BA2C3}" type="datetimeFigureOut">
               <a:rPr lang="en-US" smtClean="0"/>
               <a:pPr/>
-              <a:t>9/10/26</a:t>
+              <a:t>9/30/26</a:t>
             </a:fld>
             <a:endParaRPr lang="en-US" dirty="0"/>
           </a:p>
@@ -3599,7 +3601,7 @@
             <a:fld id="{5586B75A-687E-405C-8A0B-8D00578BA2C3}" type="datetimeFigureOut">
               <a:rPr lang="en-US" smtClean="0"/>
               <a:pPr/>
-              <a:t>9/10/26</a:t>
+              <a:t>9/30/26</a:t>
             </a:fld>
             <a:endParaRPr lang="en-US" dirty="0"/>
           </a:p>
@@ -3889,7 +3891,7 @@
             <a:fld id="{5586B75A-687E-405C-8A0B-8D00578BA2C3}" type="datetimeFigureOut">
               <a:rPr lang="en-US" smtClean="0"/>
               <a:pPr/>
-              <a:t>9/10/26</a:t>
+              <a:t>9/30/26</a:t>
             </a:fld>
             <a:endParaRPr lang="en-US" dirty="0"/>
           </a:p>
@@ -4333,7 +4335,7 @@
             <a:fld id="{5586B75A-687E-405C-8A0B-8D00578BA2C3}" type="datetimeFigureOut">
               <a:rPr lang="en-US" smtClean="0"/>
               <a:pPr/>
-              <a:t>9/10/26</a:t>
+              <a:t>9/30/26</a:t>
             </a:fld>
             <a:endParaRPr lang="en-US" dirty="0"/>
           </a:p>
@@ -4453,7 +4455,7 @@
             <a:fld id="{5586B75A-687E-405C-8A0B-8D00578BA2C3}" type="datetimeFigureOut">
               <a:rPr lang="en-US" smtClean="0"/>
               <a:pPr/>
-              <a:t>9/10/26</a:t>
+              <a:t>9/30/26</a:t>
             </a:fld>
             <a:endParaRPr lang="en-US" dirty="0"/>
           </a:p>
@@ -4550,7 +4552,7 @@
             <a:fld id="{5586B75A-687E-405C-8A0B-8D00578BA2C3}" type="datetimeFigureOut">
               <a:rPr lang="en-US" smtClean="0"/>
               <a:pPr/>
-              <a:t>9/10/26</a:t>
+              <a:t>9/30/26</a:t>
             </a:fld>
             <a:endParaRPr lang="en-US" dirty="0"/>
           </a:p>
@@ -4840,7 +4842,7 @@
             <a:fld id="{5586B75A-687E-405C-8A0B-8D00578BA2C3}" type="datetimeFigureOut">
               <a:rPr lang="en-US" smtClean="0"/>
               <a:pPr/>
-              <a:t>9/10/26</a:t>
+              <a:t>9/30/26</a:t>
             </a:fld>
             <a:endParaRPr lang="en-US" dirty="0"/>
           </a:p>
@@ -5115,7 +5117,7 @@
             <a:fld id="{5586B75A-687E-405C-8A0B-8D00578BA2C3}" type="datetimeFigureOut">
               <a:rPr lang="en-US" smtClean="0"/>
               <a:pPr/>
-              <a:t>9/10/26</a:t>
+              <a:t>9/30/26</a:t>
             </a:fld>
             <a:endParaRPr lang="en-US" dirty="0"/>
           </a:p>
@@ -5428,7 +5430,7 @@
             <a:fld id="{5586B75A-687E-405C-8A0B-8D00578BA2C3}" type="datetimeFigureOut">
               <a:rPr lang="en-US" smtClean="0"/>
               <a:pPr/>
-              <a:t>9/10/26</a:t>
+              <a:t>9/30/26</a:t>
             </a:fld>
             <a:endParaRPr lang="en-US" dirty="0"/>
           </a:p>
@@ -5996,6 +5998,704 @@
         <p:cNvPr id="1" name="">
           <a:extLst>
             <a:ext uri="{FF2B5EF4-FFF2-40B4-BE49-F238E27FC236}">
+              <a16:creationId xmlns:a16="http://schemas.microsoft.com/office/drawing/2014/main" id="{39696472-50C9-29D4-0989-B78B94809588}"/>
+            </a:ext>
+          </a:extLst>
+        </p:cNvPr>
+        <p:cNvGrpSpPr/>
+        <p:nvPr/>
+      </p:nvGrpSpPr>
+      <p:grpSpPr>
+        <a:xfrm>
+          <a:off x="0" y="0"/>
+          <a:ext cx="0" cy="0"/>
+          <a:chOff x="0" y="0"/>
+          <a:chExt cx="0" cy="0"/>
+        </a:xfrm>
+      </p:grpSpPr>
+      <p:sp>
+        <p:nvSpPr>
+          <p:cNvPr id="2" name="Title 1">
+            <a:extLst>
+              <a:ext uri="{FF2B5EF4-FFF2-40B4-BE49-F238E27FC236}">
+                <a16:creationId xmlns:a16="http://schemas.microsoft.com/office/drawing/2014/main" id="{31DA3DF6-D7A0-0E3E-DB33-A354B106AD10}"/>
+              </a:ext>
+            </a:extLst>
+          </p:cNvPr>
+          <p:cNvSpPr>
+            <a:spLocks noGrp="1"/>
+          </p:cNvSpPr>
+          <p:nvPr>
+            <p:ph type="title"/>
+          </p:nvPr>
+        </p:nvSpPr>
+        <p:spPr/>
+        <p:txBody>
+          <a:bodyPr/>
+          <a:lstStyle/>
+          <a:p>
+            <a:r>
+              <a:rPr lang="en-US" dirty="0"/>
+              <a:t>Visualization Rhetoric</a:t>
+            </a:r>
+          </a:p>
+        </p:txBody>
+      </p:sp>
+      <p:sp>
+        <p:nvSpPr>
+          <p:cNvPr id="3" name="TextBox 2">
+            <a:extLst>
+              <a:ext uri="{FF2B5EF4-FFF2-40B4-BE49-F238E27FC236}">
+                <a16:creationId xmlns:a16="http://schemas.microsoft.com/office/drawing/2014/main" id="{718B14CE-FE70-7368-FE92-41D2F67ACA94}"/>
+              </a:ext>
+            </a:extLst>
+          </p:cNvPr>
+          <p:cNvSpPr txBox="1"/>
+          <p:nvPr/>
+        </p:nvSpPr>
+        <p:spPr>
+          <a:xfrm>
+            <a:off x="3348938" y="6336797"/>
+            <a:ext cx="8843062" cy="369332"/>
+          </a:xfrm>
+          <a:prstGeom prst="rect">
+            <a:avLst/>
+          </a:prstGeom>
+          <a:noFill/>
+        </p:spPr>
+        <p:txBody>
+          <a:bodyPr wrap="none" rtlCol="0">
+            <a:spAutoFit/>
+          </a:bodyPr>
+          <a:lstStyle/>
+          <a:p>
+            <a:r>
+              <a:rPr lang="en-US" dirty="0"/>
+              <a:t>Visualization Rhetoric: Framing Effects in Narrative Visualization; </a:t>
+            </a:r>
+            <a:r>
+              <a:rPr lang="en-US" dirty="0" err="1"/>
+              <a:t>Hullman</a:t>
+            </a:r>
+            <a:r>
+              <a:rPr lang="en-US" dirty="0"/>
+              <a:t> and </a:t>
+            </a:r>
+            <a:r>
+              <a:rPr lang="en-US" dirty="0" err="1"/>
+              <a:t>Diakopoulos</a:t>
+            </a:r>
+            <a:endParaRPr lang="en-US" dirty="0"/>
+          </a:p>
+        </p:txBody>
+      </p:sp>
+      <p:sp>
+        <p:nvSpPr>
+          <p:cNvPr id="5" name="Content Placeholder 2">
+            <a:extLst>
+              <a:ext uri="{FF2B5EF4-FFF2-40B4-BE49-F238E27FC236}">
+                <a16:creationId xmlns:a16="http://schemas.microsoft.com/office/drawing/2014/main" id="{B701B401-2ADF-C780-9BE3-49FFCF6EDC44}"/>
+              </a:ext>
+            </a:extLst>
+          </p:cNvPr>
+          <p:cNvSpPr>
+            <a:spLocks noGrp="1"/>
+          </p:cNvSpPr>
+          <p:nvPr>
+            <p:ph idx="1"/>
+          </p:nvPr>
+        </p:nvSpPr>
+        <p:spPr>
+          <a:xfrm>
+            <a:off x="3869268" y="864108"/>
+            <a:ext cx="7315200" cy="5120640"/>
+          </a:xfrm>
+        </p:spPr>
+        <p:txBody>
+          <a:bodyPr anchor="t">
+            <a:normAutofit/>
+          </a:bodyPr>
+          <a:lstStyle/>
+          <a:p>
+            <a:pPr marL="0" indent="0">
+              <a:spcBef>
+                <a:spcPts val="0"/>
+              </a:spcBef>
+              <a:buSzPts val="2040"/>
+              <a:buNone/>
+            </a:pPr>
+            <a:r>
+              <a:rPr lang="en-US" sz="2400" b="1" dirty="0"/>
+              <a:t>Editorial Layers</a:t>
+            </a:r>
+          </a:p>
+          <a:p>
+            <a:pPr marL="0" indent="0">
+              <a:spcBef>
+                <a:spcPts val="0"/>
+              </a:spcBef>
+              <a:buSzPts val="2040"/>
+              <a:buNone/>
+            </a:pPr>
+            <a:endParaRPr lang="en-US" sz="2400" dirty="0"/>
+          </a:p>
+          <a:p>
+            <a:pPr marL="457200" indent="-457200">
+              <a:spcBef>
+                <a:spcPts val="0"/>
+              </a:spcBef>
+              <a:buSzPts val="2040"/>
+              <a:buFont typeface="+mj-lt"/>
+              <a:buAutoNum type="arabicPeriod"/>
+            </a:pPr>
+            <a:r>
+              <a:rPr lang="en-US" sz="2400" dirty="0"/>
+              <a:t>The Data</a:t>
+            </a:r>
+          </a:p>
+          <a:p>
+            <a:pPr marL="457200" indent="-457200">
+              <a:spcBef>
+                <a:spcPts val="0"/>
+              </a:spcBef>
+              <a:buSzPts val="2040"/>
+              <a:buFont typeface="+mj-lt"/>
+              <a:buAutoNum type="arabicPeriod"/>
+            </a:pPr>
+            <a:endParaRPr lang="en-US" sz="2400" dirty="0"/>
+          </a:p>
+          <a:p>
+            <a:pPr marL="457200" indent="-457200">
+              <a:spcBef>
+                <a:spcPts val="0"/>
+              </a:spcBef>
+              <a:buSzPts val="2040"/>
+              <a:buFont typeface="+mj-lt"/>
+              <a:buAutoNum type="arabicPeriod"/>
+            </a:pPr>
+            <a:r>
+              <a:rPr lang="en-US" sz="2400" dirty="0"/>
+              <a:t>Visual Representation </a:t>
+            </a:r>
+          </a:p>
+          <a:p>
+            <a:pPr marL="457200" indent="-457200">
+              <a:spcBef>
+                <a:spcPts val="0"/>
+              </a:spcBef>
+              <a:buSzPts val="2040"/>
+              <a:buFont typeface="+mj-lt"/>
+              <a:buAutoNum type="arabicPeriod"/>
+            </a:pPr>
+            <a:endParaRPr lang="en-US" sz="2400" dirty="0"/>
+          </a:p>
+          <a:p>
+            <a:pPr marL="457200" indent="-457200">
+              <a:spcBef>
+                <a:spcPts val="0"/>
+              </a:spcBef>
+              <a:buSzPts val="2040"/>
+              <a:buFont typeface="+mj-lt"/>
+              <a:buAutoNum type="arabicPeriod"/>
+            </a:pPr>
+            <a:r>
+              <a:rPr lang="en-US" sz="2400" dirty="0"/>
+              <a:t>Textual Annotations </a:t>
+            </a:r>
+          </a:p>
+          <a:p>
+            <a:pPr marL="457200" indent="-457200">
+              <a:spcBef>
+                <a:spcPts val="0"/>
+              </a:spcBef>
+              <a:buSzPts val="2040"/>
+              <a:buFont typeface="+mj-lt"/>
+              <a:buAutoNum type="arabicPeriod"/>
+            </a:pPr>
+            <a:endParaRPr lang="en-US" sz="2400" dirty="0"/>
+          </a:p>
+          <a:p>
+            <a:pPr marL="457200" indent="-457200">
+              <a:spcBef>
+                <a:spcPts val="0"/>
+              </a:spcBef>
+              <a:buSzPts val="2040"/>
+              <a:buFont typeface="+mj-lt"/>
+              <a:buAutoNum type="arabicPeriod"/>
+            </a:pPr>
+            <a:r>
+              <a:rPr lang="en-US" sz="2400" dirty="0"/>
+              <a:t>Interactivity </a:t>
+            </a:r>
+          </a:p>
+        </p:txBody>
+      </p:sp>
+      <p:sp>
+        <p:nvSpPr>
+          <p:cNvPr id="4" name="Rounded Rectangle 3">
+            <a:extLst>
+              <a:ext uri="{FF2B5EF4-FFF2-40B4-BE49-F238E27FC236}">
+                <a16:creationId xmlns:a16="http://schemas.microsoft.com/office/drawing/2014/main" id="{F6C6F879-26D5-5D9C-7F2B-05C4F14381A7}"/>
+              </a:ext>
+            </a:extLst>
+          </p:cNvPr>
+          <p:cNvSpPr/>
+          <p:nvPr/>
+        </p:nvSpPr>
+        <p:spPr>
+          <a:xfrm>
+            <a:off x="3348938" y="4226189"/>
+            <a:ext cx="8602548" cy="1498831"/>
+          </a:xfrm>
+          <a:prstGeom prst="roundRect">
+            <a:avLst/>
+          </a:prstGeom>
+        </p:spPr>
+        <p:style>
+          <a:lnRef idx="0">
+            <a:schemeClr val="accent5"/>
+          </a:lnRef>
+          <a:fillRef idx="3">
+            <a:schemeClr val="accent5"/>
+          </a:fillRef>
+          <a:effectRef idx="3">
+            <a:schemeClr val="accent5"/>
+          </a:effectRef>
+          <a:fontRef idx="minor">
+            <a:schemeClr val="lt1"/>
+          </a:fontRef>
+        </p:style>
+        <p:txBody>
+          <a:bodyPr rtlCol="0" anchor="ctr"/>
+          <a:lstStyle/>
+          <a:p>
+            <a:pPr algn="ctr"/>
+            <a:r>
+              <a:rPr lang="en-US" sz="2400" dirty="0"/>
+              <a:t>ID one editorial decision to be made in each layer. How might that decision affect the takeaway message of the visualization? </a:t>
+            </a:r>
+          </a:p>
+        </p:txBody>
+      </p:sp>
+    </p:spTree>
+    <p:extLst>
+      <p:ext uri="{BB962C8B-B14F-4D97-AF65-F5344CB8AC3E}">
+        <p14:creationId xmlns:p14="http://schemas.microsoft.com/office/powerpoint/2010/main" val="2891675586"/>
+      </p:ext>
+    </p:extLst>
+  </p:cSld>
+  <p:clrMapOvr>
+    <a:masterClrMapping/>
+  </p:clrMapOvr>
+  <p:timing>
+    <p:tnLst>
+      <p:par>
+        <p:cTn id="1" dur="indefinite" restart="never" nodeType="tmRoot">
+          <p:childTnLst>
+            <p:seq concurrent="1" nextAc="seek">
+              <p:cTn id="2" dur="indefinite" nodeType="mainSeq">
+                <p:childTnLst>
+                  <p:par>
+                    <p:cTn id="3" fill="hold">
+                      <p:stCondLst>
+                        <p:cond delay="indefinite"/>
+                      </p:stCondLst>
+                      <p:childTnLst>
+                        <p:par>
+                          <p:cTn id="4" fill="hold">
+                            <p:stCondLst>
+                              <p:cond delay="0"/>
+                            </p:stCondLst>
+                            <p:childTnLst>
+                              <p:par>
+                                <p:cTn id="5" presetID="1" presetClass="entr" presetSubtype="0" fill="hold" grpId="0" nodeType="clickEffect">
+                                  <p:stCondLst>
+                                    <p:cond delay="0"/>
+                                  </p:stCondLst>
+                                  <p:childTnLst>
+                                    <p:set>
+                                      <p:cBhvr>
+                                        <p:cTn id="6" dur="1" fill="hold">
+                                          <p:stCondLst>
+                                            <p:cond delay="0"/>
+                                          </p:stCondLst>
+                                        </p:cTn>
+                                        <p:tgtEl>
+                                          <p:spTgt spid="4"/>
+                                        </p:tgtEl>
+                                        <p:attrNameLst>
+                                          <p:attrName>style.visibility</p:attrName>
+                                        </p:attrNameLst>
+                                      </p:cBhvr>
+                                      <p:to>
+                                        <p:strVal val="visible"/>
+                                      </p:to>
+                                    </p:set>
+                                  </p:childTnLst>
+                                </p:cTn>
+                              </p:par>
+                            </p:childTnLst>
+                          </p:cTn>
+                        </p:par>
+                      </p:childTnLst>
+                    </p:cTn>
+                  </p:par>
+                </p:childTnLst>
+              </p:cTn>
+              <p:prevCondLst>
+                <p:cond evt="onPrev" delay="0">
+                  <p:tgtEl>
+                    <p:sldTgt/>
+                  </p:tgtEl>
+                </p:cond>
+              </p:prevCondLst>
+              <p:nextCondLst>
+                <p:cond evt="onNext" delay="0">
+                  <p:tgtEl>
+                    <p:sldTgt/>
+                  </p:tgtEl>
+                </p:cond>
+              </p:nextCondLst>
+            </p:seq>
+          </p:childTnLst>
+        </p:cTn>
+      </p:par>
+    </p:tnLst>
+    <p:bldLst>
+      <p:bldP spid="4" grpId="0" animBg="1"/>
+    </p:bldLst>
+  </p:timing>
+</p:sld>
+</file>
+
+<file path=ppt/slides/slide11.xml><?xml version="1.0" encoding="utf-8"?>
+<p:sld xmlns:a="http://schemas.openxmlformats.org/drawingml/2006/main" xmlns:r="http://schemas.openxmlformats.org/officeDocument/2006/relationships" xmlns:p="http://schemas.openxmlformats.org/presentationml/2006/main">
+  <p:cSld>
+    <p:spTree>
+      <p:nvGrpSpPr>
+        <p:cNvPr id="1" name="">
+          <a:extLst>
+            <a:ext uri="{FF2B5EF4-FFF2-40B4-BE49-F238E27FC236}">
+              <a16:creationId xmlns:a16="http://schemas.microsoft.com/office/drawing/2014/main" id="{EBE6C9A6-51AC-857D-A8B3-07C5BA520C42}"/>
+            </a:ext>
+          </a:extLst>
+        </p:cNvPr>
+        <p:cNvGrpSpPr/>
+        <p:nvPr/>
+      </p:nvGrpSpPr>
+      <p:grpSpPr>
+        <a:xfrm>
+          <a:off x="0" y="0"/>
+          <a:ext cx="0" cy="0"/>
+          <a:chOff x="0" y="0"/>
+          <a:chExt cx="0" cy="0"/>
+        </a:xfrm>
+      </p:grpSpPr>
+      <p:sp>
+        <p:nvSpPr>
+          <p:cNvPr id="2" name="Title 1">
+            <a:extLst>
+              <a:ext uri="{FF2B5EF4-FFF2-40B4-BE49-F238E27FC236}">
+                <a16:creationId xmlns:a16="http://schemas.microsoft.com/office/drawing/2014/main" id="{13C2CC2F-B619-8C24-3E10-B026E8F2BFCF}"/>
+              </a:ext>
+            </a:extLst>
+          </p:cNvPr>
+          <p:cNvSpPr>
+            <a:spLocks noGrp="1"/>
+          </p:cNvSpPr>
+          <p:nvPr>
+            <p:ph type="title"/>
+          </p:nvPr>
+        </p:nvSpPr>
+        <p:spPr/>
+        <p:txBody>
+          <a:bodyPr/>
+          <a:lstStyle/>
+          <a:p>
+            <a:r>
+              <a:rPr lang="en-US" dirty="0"/>
+              <a:t>Visualization Rhetoric Techniques</a:t>
+            </a:r>
+          </a:p>
+        </p:txBody>
+      </p:sp>
+      <p:sp>
+        <p:nvSpPr>
+          <p:cNvPr id="3" name="TextBox 2">
+            <a:extLst>
+              <a:ext uri="{FF2B5EF4-FFF2-40B4-BE49-F238E27FC236}">
+                <a16:creationId xmlns:a16="http://schemas.microsoft.com/office/drawing/2014/main" id="{0E024E04-B943-3294-8C8C-7225B67B050D}"/>
+              </a:ext>
+            </a:extLst>
+          </p:cNvPr>
+          <p:cNvSpPr txBox="1"/>
+          <p:nvPr/>
+        </p:nvSpPr>
+        <p:spPr>
+          <a:xfrm>
+            <a:off x="3348938" y="6336797"/>
+            <a:ext cx="8843062" cy="369332"/>
+          </a:xfrm>
+          <a:prstGeom prst="rect">
+            <a:avLst/>
+          </a:prstGeom>
+          <a:noFill/>
+        </p:spPr>
+        <p:txBody>
+          <a:bodyPr wrap="none" rtlCol="0">
+            <a:spAutoFit/>
+          </a:bodyPr>
+          <a:lstStyle/>
+          <a:p>
+            <a:r>
+              <a:rPr lang="en-US" dirty="0"/>
+              <a:t>Visualization Rhetoric: Framing Effects in Narrative Visualization; </a:t>
+            </a:r>
+            <a:r>
+              <a:rPr lang="en-US" dirty="0" err="1"/>
+              <a:t>Hullman</a:t>
+            </a:r>
+            <a:r>
+              <a:rPr lang="en-US" dirty="0"/>
+              <a:t> and </a:t>
+            </a:r>
+            <a:r>
+              <a:rPr lang="en-US" dirty="0" err="1"/>
+              <a:t>Diakopoulos</a:t>
+            </a:r>
+            <a:endParaRPr lang="en-US" dirty="0"/>
+          </a:p>
+        </p:txBody>
+      </p:sp>
+      <p:sp>
+        <p:nvSpPr>
+          <p:cNvPr id="5" name="Content Placeholder 2">
+            <a:extLst>
+              <a:ext uri="{FF2B5EF4-FFF2-40B4-BE49-F238E27FC236}">
+                <a16:creationId xmlns:a16="http://schemas.microsoft.com/office/drawing/2014/main" id="{F07CA44E-0D23-3E57-7BE6-F6E91C87BC69}"/>
+              </a:ext>
+            </a:extLst>
+          </p:cNvPr>
+          <p:cNvSpPr>
+            <a:spLocks noGrp="1"/>
+          </p:cNvSpPr>
+          <p:nvPr>
+            <p:ph idx="1"/>
+          </p:nvPr>
+        </p:nvSpPr>
+        <p:spPr>
+          <a:xfrm>
+            <a:off x="3817509" y="432787"/>
+            <a:ext cx="7315200" cy="5120640"/>
+          </a:xfrm>
+        </p:spPr>
+        <p:txBody>
+          <a:bodyPr anchor="t">
+            <a:noAutofit/>
+          </a:bodyPr>
+          <a:lstStyle/>
+          <a:p>
+            <a:pPr marL="0" indent="0">
+              <a:spcBef>
+                <a:spcPts val="0"/>
+              </a:spcBef>
+              <a:buSzPts val="2040"/>
+              <a:buNone/>
+            </a:pPr>
+            <a:r>
+              <a:rPr lang="en-US" sz="2400" b="1" dirty="0"/>
+              <a:t>Information Access Rhetoric </a:t>
+            </a:r>
+          </a:p>
+          <a:p>
+            <a:pPr marL="0" indent="0">
+              <a:spcBef>
+                <a:spcPts val="0"/>
+              </a:spcBef>
+              <a:buSzPts val="2040"/>
+              <a:buNone/>
+            </a:pPr>
+            <a:endParaRPr lang="en-US" sz="2400" b="1" dirty="0"/>
+          </a:p>
+          <a:p>
+            <a:pPr>
+              <a:spcBef>
+                <a:spcPts val="0"/>
+              </a:spcBef>
+              <a:buSzPts val="2040"/>
+            </a:pPr>
+            <a:r>
+              <a:rPr lang="en-US" sz="2400" dirty="0"/>
+              <a:t>Omission </a:t>
+            </a:r>
+          </a:p>
+          <a:p>
+            <a:pPr lvl="1">
+              <a:spcBef>
+                <a:spcPts val="0"/>
+              </a:spcBef>
+              <a:buSzPts val="2040"/>
+            </a:pPr>
+            <a:r>
+              <a:rPr lang="en-US" sz="2400" dirty="0"/>
+              <a:t>Neglecting to cite data sources </a:t>
+            </a:r>
+          </a:p>
+          <a:p>
+            <a:pPr lvl="1">
+              <a:spcBef>
+                <a:spcPts val="0"/>
+              </a:spcBef>
+              <a:buSzPts val="2040"/>
+            </a:pPr>
+            <a:r>
+              <a:rPr lang="en-US" sz="2400" dirty="0"/>
+              <a:t>Defining variables ambiguously </a:t>
+            </a:r>
+          </a:p>
+          <a:p>
+            <a:pPr lvl="1">
+              <a:spcBef>
+                <a:spcPts val="0"/>
+              </a:spcBef>
+              <a:buSzPts val="2040"/>
+            </a:pPr>
+            <a:r>
+              <a:rPr lang="en-US" sz="2400" dirty="0"/>
+              <a:t>Knowledge assumptions of the end-user </a:t>
+            </a:r>
+          </a:p>
+          <a:p>
+            <a:pPr lvl="1">
+              <a:spcBef>
+                <a:spcPts val="0"/>
+              </a:spcBef>
+              <a:buSzPts val="2040"/>
+            </a:pPr>
+            <a:r>
+              <a:rPr lang="en-US" sz="2400" dirty="0"/>
+              <a:t>Thresholding values </a:t>
+            </a:r>
+          </a:p>
+          <a:p>
+            <a:pPr lvl="1">
+              <a:spcBef>
+                <a:spcPts val="0"/>
+              </a:spcBef>
+              <a:buSzPts val="2040"/>
+            </a:pPr>
+            <a:r>
+              <a:rPr lang="en-US" sz="2400" dirty="0"/>
+              <a:t>Omitting exceptional cases </a:t>
+            </a:r>
+          </a:p>
+          <a:p>
+            <a:pPr lvl="1">
+              <a:spcBef>
+                <a:spcPts val="0"/>
+              </a:spcBef>
+              <a:buSzPts val="2040"/>
+            </a:pPr>
+            <a:r>
+              <a:rPr lang="en-US" sz="2400" dirty="0"/>
+              <a:t>Thresholding axes </a:t>
+            </a:r>
+          </a:p>
+          <a:p>
+            <a:pPr lvl="1">
+              <a:spcBef>
+                <a:spcPts val="0"/>
+              </a:spcBef>
+              <a:buSzPts val="2040"/>
+            </a:pPr>
+            <a:r>
+              <a:rPr lang="en-US" sz="2400" dirty="0"/>
+              <a:t>Filtering</a:t>
+            </a:r>
+          </a:p>
+          <a:p>
+            <a:pPr>
+              <a:spcBef>
+                <a:spcPts val="0"/>
+              </a:spcBef>
+              <a:buSzPts val="2040"/>
+            </a:pPr>
+            <a:r>
+              <a:rPr lang="en-US" sz="2400" dirty="0"/>
+              <a:t>Metonymy (techniques the require part-to-whole relationships)</a:t>
+            </a:r>
+          </a:p>
+          <a:p>
+            <a:pPr lvl="1">
+              <a:spcBef>
+                <a:spcPts val="0"/>
+              </a:spcBef>
+              <a:buSzPts val="2040"/>
+            </a:pPr>
+            <a:r>
+              <a:rPr lang="en-US" sz="2400" dirty="0"/>
+              <a:t>Selection of variables </a:t>
+            </a:r>
+          </a:p>
+          <a:p>
+            <a:pPr lvl="1">
+              <a:spcBef>
+                <a:spcPts val="0"/>
+              </a:spcBef>
+              <a:buSzPts val="2040"/>
+            </a:pPr>
+            <a:r>
+              <a:rPr lang="en-US" sz="2400" dirty="0"/>
+              <a:t>Averaging </a:t>
+            </a:r>
+          </a:p>
+          <a:p>
+            <a:pPr lvl="1">
+              <a:spcBef>
+                <a:spcPts val="0"/>
+              </a:spcBef>
+              <a:buSzPts val="2040"/>
+            </a:pPr>
+            <a:r>
+              <a:rPr lang="en-US" sz="2400" dirty="0"/>
+              <a:t>Textual and visual summaries </a:t>
+            </a:r>
+          </a:p>
+          <a:p>
+            <a:pPr lvl="1">
+              <a:spcBef>
+                <a:spcPts val="0"/>
+              </a:spcBef>
+              <a:buSzPts val="2040"/>
+            </a:pPr>
+            <a:r>
+              <a:rPr lang="en-US" sz="2400" dirty="0"/>
+              <a:t>Categorizing, binning, or aggregating </a:t>
+            </a:r>
+          </a:p>
+        </p:txBody>
+      </p:sp>
+    </p:spTree>
+    <p:extLst>
+      <p:ext uri="{BB962C8B-B14F-4D97-AF65-F5344CB8AC3E}">
+        <p14:creationId xmlns:p14="http://schemas.microsoft.com/office/powerpoint/2010/main" val="3683809271"/>
+      </p:ext>
+    </p:extLst>
+  </p:cSld>
+  <p:clrMapOvr>
+    <a:masterClrMapping/>
+  </p:clrMapOvr>
+</p:sld>
+</file>
+
+<file path=ppt/slides/slide12.xml><?xml version="1.0" encoding="utf-8"?>
+<p:sld xmlns:a="http://schemas.openxmlformats.org/drawingml/2006/main" xmlns:r="http://schemas.openxmlformats.org/officeDocument/2006/relationships" xmlns:p="http://schemas.openxmlformats.org/presentationml/2006/main">
+  <p:cSld>
+    <p:spTree>
+      <p:nvGrpSpPr>
+        <p:cNvPr id="1" name="">
+          <a:extLst>
+            <a:ext uri="{FF2B5EF4-FFF2-40B4-BE49-F238E27FC236}">
               <a16:creationId xmlns:a16="http://schemas.microsoft.com/office/drawing/2014/main" id="{1DCC09CF-3850-5308-EE6B-009B64AE7EC5}"/>
             </a:ext>
           </a:extLst>
@@ -6345,7 +7045,7 @@
 </p:sld>
 </file>
 
-<file path=ppt/slides/slide11.xml><?xml version="1.0" encoding="utf-8"?>
+<file path=ppt/slides/slide13.xml><?xml version="1.0" encoding="utf-8"?>
 <p:sld xmlns:a="http://schemas.openxmlformats.org/drawingml/2006/main" xmlns:r="http://schemas.openxmlformats.org/officeDocument/2006/relationships" xmlns:p="http://schemas.openxmlformats.org/presentationml/2006/main">
   <p:cSld>
     <p:spTree>
@@ -6690,7 +7390,7 @@
 </p:sld>
 </file>
 
-<file path=ppt/slides/slide12.xml><?xml version="1.0" encoding="utf-8"?>
+<file path=ppt/slides/slide14.xml><?xml version="1.0" encoding="utf-8"?>
 <p:sld xmlns:a="http://schemas.openxmlformats.org/drawingml/2006/main" xmlns:r="http://schemas.openxmlformats.org/officeDocument/2006/relationships" xmlns:p="http://schemas.openxmlformats.org/presentationml/2006/main">
   <p:cSld>
     <p:spTree>
@@ -6984,7 +7684,7 @@
 </p:sld>
 </file>
 
-<file path=ppt/slides/slide13.xml><?xml version="1.0" encoding="utf-8"?>
+<file path=ppt/slides/slide15.xml><?xml version="1.0" encoding="utf-8"?>
 <p:sld xmlns:a="http://schemas.openxmlformats.org/drawingml/2006/main" xmlns:r="http://schemas.openxmlformats.org/officeDocument/2006/relationships" xmlns:p="http://schemas.openxmlformats.org/presentationml/2006/main">
   <p:cSld>
     <p:spTree>
@@ -7257,7 +7957,7 @@
 </p:sld>
 </file>
 
-<file path=ppt/slides/slide14.xml><?xml version="1.0" encoding="utf-8"?>
+<file path=ppt/slides/slide16.xml><?xml version="1.0" encoding="utf-8"?>
 <p:sld xmlns:a="http://schemas.openxmlformats.org/drawingml/2006/main" xmlns:r="http://schemas.openxmlformats.org/officeDocument/2006/relationships" xmlns:p="http://schemas.openxmlformats.org/presentationml/2006/main">
   <p:cSld>
     <p:spTree>
@@ -7578,7 +8278,7 @@
 </p:sld>
 </file>
 
-<file path=ppt/slides/slide15.xml><?xml version="1.0" encoding="utf-8"?>
+<file path=ppt/slides/slide17.xml><?xml version="1.0" encoding="utf-8"?>
 <p:sld xmlns:a="http://schemas.openxmlformats.org/drawingml/2006/main" xmlns:r="http://schemas.openxmlformats.org/officeDocument/2006/relationships" xmlns:p="http://schemas.openxmlformats.org/presentationml/2006/main">
   <p:cSld>
     <p:spTree>
@@ -7875,7 +8575,7 @@
 </p:sld>
 </file>
 
-<file path=ppt/slides/slide16.xml><?xml version="1.0" encoding="utf-8"?>
+<file path=ppt/slides/slide18.xml><?xml version="1.0" encoding="utf-8"?>
 <p:sld xmlns:a="http://schemas.openxmlformats.org/drawingml/2006/main" xmlns:r="http://schemas.openxmlformats.org/officeDocument/2006/relationships" xmlns:p="http://schemas.openxmlformats.org/presentationml/2006/main">
   <p:cSld>
     <p:spTree>
@@ -8034,7 +8734,7 @@
 </p:sld>
 </file>
 
-<file path=ppt/slides/slide17.xml><?xml version="1.0" encoding="utf-8"?>
+<file path=ppt/slides/slide19.xml><?xml version="1.0" encoding="utf-8"?>
 <p:sld xmlns:a="http://schemas.openxmlformats.org/drawingml/2006/main" xmlns:r="http://schemas.openxmlformats.org/officeDocument/2006/relationships" xmlns:p="http://schemas.openxmlformats.org/presentationml/2006/main">
   <p:cSld>
     <p:spTree>
@@ -8176,7 +8876,100 @@
 </p:sld>
 </file>
 
-<file path=ppt/slides/slide18.xml><?xml version="1.0" encoding="utf-8"?>
+<file path=ppt/slides/slide2.xml><?xml version="1.0" encoding="utf-8"?>
+<p:sld xmlns:a="http://schemas.openxmlformats.org/drawingml/2006/main" xmlns:r="http://schemas.openxmlformats.org/officeDocument/2006/relationships" xmlns:p="http://schemas.openxmlformats.org/presentationml/2006/main">
+  <p:cSld>
+    <p:spTree>
+      <p:nvGrpSpPr>
+        <p:cNvPr id="1" name="">
+          <a:extLst>
+            <a:ext uri="{FF2B5EF4-FFF2-40B4-BE49-F238E27FC236}">
+              <a16:creationId xmlns:a16="http://schemas.microsoft.com/office/drawing/2014/main" id="{39969315-1AF6-B0AF-A176-3C8576695491}"/>
+            </a:ext>
+          </a:extLst>
+        </p:cNvPr>
+        <p:cNvGrpSpPr/>
+        <p:nvPr/>
+      </p:nvGrpSpPr>
+      <p:grpSpPr>
+        <a:xfrm>
+          <a:off x="0" y="0"/>
+          <a:ext cx="0" cy="0"/>
+          <a:chOff x="0" y="0"/>
+          <a:chExt cx="0" cy="0"/>
+        </a:xfrm>
+      </p:grpSpPr>
+      <p:pic>
+        <p:nvPicPr>
+          <p:cNvPr id="9" name="Content Placeholder 8">
+            <a:extLst>
+              <a:ext uri="{FF2B5EF4-FFF2-40B4-BE49-F238E27FC236}">
+                <a16:creationId xmlns:a16="http://schemas.microsoft.com/office/drawing/2014/main" id="{95B872F2-8C22-26A7-60EE-37F7E6BC32F4}"/>
+              </a:ext>
+            </a:extLst>
+          </p:cNvPr>
+          <p:cNvPicPr>
+            <a:picLocks noGrp="1" noChangeAspect="1"/>
+          </p:cNvPicPr>
+          <p:nvPr>
+            <p:ph idx="1"/>
+          </p:nvPr>
+        </p:nvPicPr>
+        <p:blipFill>
+          <a:blip r:embed="rId2"/>
+          <a:stretch>
+            <a:fillRect/>
+          </a:stretch>
+        </p:blipFill>
+        <p:spPr>
+          <a:xfrm>
+            <a:off x="5131591" y="0"/>
+            <a:ext cx="4450052" cy="6755117"/>
+          </a:xfrm>
+          <a:prstGeom prst="rect">
+            <a:avLst/>
+          </a:prstGeom>
+        </p:spPr>
+      </p:pic>
+      <p:sp>
+        <p:nvSpPr>
+          <p:cNvPr id="7" name="Title 6">
+            <a:extLst>
+              <a:ext uri="{FF2B5EF4-FFF2-40B4-BE49-F238E27FC236}">
+                <a16:creationId xmlns:a16="http://schemas.microsoft.com/office/drawing/2014/main" id="{07BC90E6-2B41-1192-8371-A1F294CF50AB}"/>
+              </a:ext>
+            </a:extLst>
+          </p:cNvPr>
+          <p:cNvSpPr>
+            <a:spLocks noGrp="1"/>
+          </p:cNvSpPr>
+          <p:nvPr>
+            <p:ph type="title"/>
+          </p:nvPr>
+        </p:nvSpPr>
+        <p:spPr/>
+        <p:txBody>
+          <a:bodyPr/>
+          <a:lstStyle/>
+          <a:p>
+            <a:endParaRPr lang="en-US"/>
+          </a:p>
+        </p:txBody>
+      </p:sp>
+    </p:spTree>
+    <p:extLst>
+      <p:ext uri="{BB962C8B-B14F-4D97-AF65-F5344CB8AC3E}">
+        <p14:creationId xmlns:p14="http://schemas.microsoft.com/office/powerpoint/2010/main" val="2172173379"/>
+      </p:ext>
+    </p:extLst>
+  </p:cSld>
+  <p:clrMapOvr>
+    <a:masterClrMapping/>
+  </p:clrMapOvr>
+</p:sld>
+</file>
+
+<file path=ppt/slides/slide20.xml><?xml version="1.0" encoding="utf-8"?>
 <p:sld xmlns:a="http://schemas.openxmlformats.org/drawingml/2006/main" xmlns:r="http://schemas.openxmlformats.org/officeDocument/2006/relationships" xmlns:p="http://schemas.openxmlformats.org/presentationml/2006/main">
   <p:cSld>
     <p:spTree>
@@ -8605,7 +9398,7 @@
 </p:sld>
 </file>
 
-<file path=ppt/slides/slide19.xml><?xml version="1.0" encoding="utf-8"?>
+<file path=ppt/slides/slide21.xml><?xml version="1.0" encoding="utf-8"?>
 <p:sld xmlns:a="http://schemas.openxmlformats.org/drawingml/2006/main" xmlns:r="http://schemas.openxmlformats.org/officeDocument/2006/relationships" xmlns:p="http://schemas.openxmlformats.org/presentationml/2006/main">
   <p:cSld>
     <p:spTree>
@@ -8958,7 +9751,7 @@
 </p:sld>
 </file>
 
-<file path=ppt/slides/slide2.xml><?xml version="1.0" encoding="utf-8"?>
+<file path=ppt/slides/slide22.xml><?xml version="1.0" encoding="utf-8"?>
 <p:sld xmlns:a="http://schemas.openxmlformats.org/drawingml/2006/main" xmlns:r="http://schemas.openxmlformats.org/officeDocument/2006/relationships" xmlns:p="http://schemas.openxmlformats.org/presentationml/2006/main">
   <p:cSld>
     <p:spTree>
@@ -8998,129 +9791,6 @@
           <a:p>
             <a:r>
               <a:rPr lang="en-US" dirty="0"/>
-              <a:t>Plan for Today</a:t>
-            </a:r>
-          </a:p>
-        </p:txBody>
-      </p:sp>
-      <p:sp>
-        <p:nvSpPr>
-          <p:cNvPr id="3" name="Content Placeholder 2">
-            <a:extLst>
-              <a:ext uri="{FF2B5EF4-FFF2-40B4-BE49-F238E27FC236}">
-                <a16:creationId xmlns:a16="http://schemas.microsoft.com/office/drawing/2014/main" id="{9EAE50F6-429C-715A-C25C-1C7744AED1CF}"/>
-              </a:ext>
-            </a:extLst>
-          </p:cNvPr>
-          <p:cNvSpPr>
-            <a:spLocks noGrp="1"/>
-          </p:cNvSpPr>
-          <p:nvPr>
-            <p:ph idx="1"/>
-          </p:nvPr>
-        </p:nvSpPr>
-        <p:spPr/>
-        <p:txBody>
-          <a:bodyPr>
-            <a:normAutofit/>
-          </a:bodyPr>
-          <a:lstStyle/>
-          <a:p>
-            <a:pPr>
-              <a:spcBef>
-                <a:spcPts val="0"/>
-              </a:spcBef>
-              <a:buSzPts val="2040"/>
-              <a:buFont typeface="Arial"/>
-              <a:buChar char="•"/>
-            </a:pPr>
-            <a:r>
-              <a:rPr lang="en-US" sz="2400" dirty="0">
-                <a:ea typeface="Arial"/>
-                <a:cs typeface="Arial"/>
-                <a:sym typeface="Arial"/>
-              </a:rPr>
-              <a:t>Visualization Rhetoric</a:t>
-            </a:r>
-            <a:endParaRPr lang="en-US" sz="2200" dirty="0">
-              <a:ea typeface="Arial"/>
-              <a:cs typeface="Arial"/>
-              <a:sym typeface="Arial"/>
-            </a:endParaRPr>
-          </a:p>
-          <a:p>
-            <a:pPr>
-              <a:spcBef>
-                <a:spcPts val="0"/>
-              </a:spcBef>
-              <a:buSzPts val="2040"/>
-              <a:buFont typeface="Arial"/>
-              <a:buChar char="•"/>
-            </a:pPr>
-            <a:r>
-              <a:rPr lang="en-US" sz="2400" dirty="0">
-                <a:cs typeface="Arial"/>
-                <a:sym typeface="Arial"/>
-              </a:rPr>
-              <a:t>Persuasive Visualization  Activity </a:t>
-            </a:r>
-            <a:endParaRPr lang="en-US" sz="2400" dirty="0"/>
-          </a:p>
-        </p:txBody>
-      </p:sp>
-    </p:spTree>
-    <p:extLst>
-      <p:ext uri="{BB962C8B-B14F-4D97-AF65-F5344CB8AC3E}">
-        <p14:creationId xmlns:p14="http://schemas.microsoft.com/office/powerpoint/2010/main" val="1085546165"/>
-      </p:ext>
-    </p:extLst>
-  </p:cSld>
-  <p:clrMapOvr>
-    <a:masterClrMapping/>
-  </p:clrMapOvr>
-</p:sld>
-</file>
-
-<file path=ppt/slides/slide20.xml><?xml version="1.0" encoding="utf-8"?>
-<p:sld xmlns:a="http://schemas.openxmlformats.org/drawingml/2006/main" xmlns:r="http://schemas.openxmlformats.org/officeDocument/2006/relationships" xmlns:p="http://schemas.openxmlformats.org/presentationml/2006/main">
-  <p:cSld>
-    <p:spTree>
-      <p:nvGrpSpPr>
-        <p:cNvPr id="1" name=""/>
-        <p:cNvGrpSpPr/>
-        <p:nvPr/>
-      </p:nvGrpSpPr>
-      <p:grpSpPr>
-        <a:xfrm>
-          <a:off x="0" y="0"/>
-          <a:ext cx="0" cy="0"/>
-          <a:chOff x="0" y="0"/>
-          <a:chExt cx="0" cy="0"/>
-        </a:xfrm>
-      </p:grpSpPr>
-      <p:sp>
-        <p:nvSpPr>
-          <p:cNvPr id="2" name="Title 1">
-            <a:extLst>
-              <a:ext uri="{FF2B5EF4-FFF2-40B4-BE49-F238E27FC236}">
-                <a16:creationId xmlns:a16="http://schemas.microsoft.com/office/drawing/2014/main" id="{10D330C2-52A4-1ABA-980B-56FBC97F350C}"/>
-              </a:ext>
-            </a:extLst>
-          </p:cNvPr>
-          <p:cNvSpPr>
-            <a:spLocks noGrp="1"/>
-          </p:cNvSpPr>
-          <p:nvPr>
-            <p:ph type="title"/>
-          </p:nvPr>
-        </p:nvSpPr>
-        <p:spPr/>
-        <p:txBody>
-          <a:bodyPr/>
-          <a:lstStyle/>
-          <a:p>
-            <a:r>
-              <a:rPr lang="en-US" dirty="0"/>
               <a:t>Persuasion Techniques vs. Intent </a:t>
             </a:r>
           </a:p>
@@ -9203,7 +9873,7 @@
 </p:sld>
 </file>
 
-<file path=ppt/slides/slide21.xml><?xml version="1.0" encoding="utf-8"?>
+<file path=ppt/slides/slide23.xml><?xml version="1.0" encoding="utf-8"?>
 <p:sld xmlns:a="http://schemas.openxmlformats.org/drawingml/2006/main" xmlns:r="http://schemas.openxmlformats.org/officeDocument/2006/relationships" xmlns:p="http://schemas.openxmlformats.org/presentationml/2006/main">
   <p:cSld>
     <p:spTree>
@@ -9326,7 +9996,7 @@
 </p:sld>
 </file>
 
-<file path=ppt/slides/slide22.xml><?xml version="1.0" encoding="utf-8"?>
+<file path=ppt/slides/slide24.xml><?xml version="1.0" encoding="utf-8"?>
 <p:sld xmlns:a="http://schemas.openxmlformats.org/drawingml/2006/main" xmlns:r="http://schemas.openxmlformats.org/officeDocument/2006/relationships" xmlns:p="http://schemas.openxmlformats.org/presentationml/2006/main">
   <p:cSld>
     <p:spTree>
@@ -9448,7 +10118,7 @@
 </p:sld>
 </file>
 
-<file path=ppt/slides/slide23.xml><?xml version="1.0" encoding="utf-8"?>
+<file path=ppt/slides/slide25.xml><?xml version="1.0" encoding="utf-8"?>
 <p:sld xmlns:a="http://schemas.openxmlformats.org/drawingml/2006/main" xmlns:r="http://schemas.openxmlformats.org/officeDocument/2006/relationships" xmlns:p="http://schemas.openxmlformats.org/presentationml/2006/main">
   <p:cSld>
     <p:spTree>
@@ -9691,7 +10361,13 @@
   <p:cSld>
     <p:spTree>
       <p:nvGrpSpPr>
-        <p:cNvPr id="1" name=""/>
+        <p:cNvPr id="1" name="">
+          <a:extLst>
+            <a:ext uri="{FF2B5EF4-FFF2-40B4-BE49-F238E27FC236}">
+              <a16:creationId xmlns:a16="http://schemas.microsoft.com/office/drawing/2014/main" id="{2E8AF7BC-9D64-FF8A-B5E5-536AEFE00784}"/>
+            </a:ext>
+          </a:extLst>
+        </p:cNvPr>
         <p:cNvGrpSpPr/>
         <p:nvPr/>
       </p:nvGrpSpPr>
@@ -9705,10 +10381,10 @@
       </p:grpSpPr>
       <p:sp>
         <p:nvSpPr>
-          <p:cNvPr id="2" name="Title 1">
+          <p:cNvPr id="5" name="Title 4">
             <a:extLst>
               <a:ext uri="{FF2B5EF4-FFF2-40B4-BE49-F238E27FC236}">
-                <a16:creationId xmlns:a16="http://schemas.microsoft.com/office/drawing/2014/main" id="{10D330C2-52A4-1ABA-980B-56FBC97F350C}"/>
+                <a16:creationId xmlns:a16="http://schemas.microsoft.com/office/drawing/2014/main" id="{EFDD1AC9-26C0-8EE7-2CFC-B27DFA8DA62B}"/>
               </a:ext>
             </a:extLst>
           </p:cNvPr>
@@ -9724,101 +10400,46 @@
           <a:bodyPr/>
           <a:lstStyle/>
           <a:p>
-            <a:r>
-              <a:rPr lang="en-US" dirty="0"/>
-              <a:t>Editorial Choices</a:t>
-            </a:r>
-          </a:p>
-        </p:txBody>
-      </p:sp>
-      <p:sp>
-        <p:nvSpPr>
-          <p:cNvPr id="3" name="Content Placeholder 2">
+            <a:endParaRPr lang="en-US"/>
+          </a:p>
+        </p:txBody>
+      </p:sp>
+      <p:pic>
+        <p:nvPicPr>
+          <p:cNvPr id="9" name="Content Placeholder 8">
             <a:extLst>
               <a:ext uri="{FF2B5EF4-FFF2-40B4-BE49-F238E27FC236}">
-                <a16:creationId xmlns:a16="http://schemas.microsoft.com/office/drawing/2014/main" id="{9EAE50F6-429C-715A-C25C-1C7744AED1CF}"/>
+                <a16:creationId xmlns:a16="http://schemas.microsoft.com/office/drawing/2014/main" id="{73EADC26-7905-51DD-B80E-DF4F5C942E0D}"/>
               </a:ext>
             </a:extLst>
           </p:cNvPr>
-          <p:cNvSpPr>
-            <a:spLocks noGrp="1"/>
-          </p:cNvSpPr>
+          <p:cNvPicPr>
+            <a:picLocks noGrp="1" noChangeAspect="1"/>
+          </p:cNvPicPr>
           <p:nvPr>
             <p:ph idx="1"/>
           </p:nvPr>
-        </p:nvSpPr>
-        <p:spPr/>
-        <p:txBody>
-          <a:bodyPr>
-            <a:normAutofit/>
-          </a:bodyPr>
-          <a:lstStyle/>
-          <a:p>
-            <a:pPr>
-              <a:spcBef>
-                <a:spcPts val="0"/>
-              </a:spcBef>
-              <a:buSzPts val="2040"/>
-              <a:buFont typeface="Arial"/>
-              <a:buChar char="•"/>
-            </a:pPr>
-            <a:r>
-              <a:rPr lang="en-US" sz="2400" dirty="0">
-                <a:ea typeface="Arial"/>
-                <a:cs typeface="Arial"/>
-                <a:sym typeface="Arial"/>
-              </a:rPr>
-              <a:t>Visualizations are created by human beings </a:t>
-            </a:r>
-          </a:p>
-          <a:p>
-            <a:pPr>
-              <a:spcBef>
-                <a:spcPts val="0"/>
-              </a:spcBef>
-              <a:buSzPts val="2040"/>
-              <a:buFont typeface="Arial"/>
-              <a:buChar char="•"/>
-            </a:pPr>
-            <a:r>
-              <a:rPr lang="en-US" sz="2400" dirty="0">
-                <a:cs typeface="Arial"/>
-                <a:sym typeface="Arial"/>
-              </a:rPr>
-              <a:t>In that process editorial choices must be made </a:t>
-            </a:r>
-          </a:p>
-          <a:p>
-            <a:pPr>
-              <a:spcBef>
-                <a:spcPts val="0"/>
-              </a:spcBef>
-              <a:buSzPts val="2040"/>
-              <a:buFont typeface="Arial"/>
-              <a:buChar char="•"/>
-            </a:pPr>
-            <a:endParaRPr lang="en-US" sz="2400" dirty="0">
-              <a:cs typeface="Arial"/>
-              <a:sym typeface="Arial"/>
-            </a:endParaRPr>
-          </a:p>
-          <a:p>
-            <a:pPr>
-              <a:spcBef>
-                <a:spcPts val="0"/>
-              </a:spcBef>
-              <a:buSzPts val="2040"/>
-              <a:buFont typeface="Arial"/>
-              <a:buChar char="•"/>
-            </a:pPr>
-            <a:endParaRPr lang="en-US" sz="2400" dirty="0"/>
-          </a:p>
-        </p:txBody>
-      </p:sp>
+        </p:nvPicPr>
+        <p:blipFill>
+          <a:blip r:embed="rId2"/>
+          <a:stretch>
+            <a:fillRect/>
+          </a:stretch>
+        </p:blipFill>
+        <p:spPr>
+          <a:xfrm>
+            <a:off x="984354" y="59960"/>
+            <a:ext cx="10223292" cy="6734775"/>
+          </a:xfrm>
+          <a:prstGeom prst="rect">
+            <a:avLst/>
+          </a:prstGeom>
+        </p:spPr>
+      </p:pic>
     </p:spTree>
     <p:extLst>
       <p:ext uri="{BB962C8B-B14F-4D97-AF65-F5344CB8AC3E}">
-        <p14:creationId xmlns:p14="http://schemas.microsoft.com/office/powerpoint/2010/main" val="1739270976"/>
+        <p14:creationId xmlns:p14="http://schemas.microsoft.com/office/powerpoint/2010/main" val="1570058500"/>
       </p:ext>
     </p:extLst>
   </p:cSld>
@@ -9868,7 +10489,7 @@
           <a:p>
             <a:r>
               <a:rPr lang="en-US" dirty="0"/>
-              <a:t>Editorial Choices</a:t>
+              <a:t>Plan for Today</a:t>
             </a:r>
           </a:p>
         </p:txBody>
@@ -9910,8 +10531,13 @@
                 <a:cs typeface="Arial"/>
                 <a:sym typeface="Arial"/>
               </a:rPr>
-              <a:t>Visualizations are created by human beings </a:t>
-            </a:r>
+              <a:t>Visualization Rhetoric</a:t>
+            </a:r>
+            <a:endParaRPr lang="en-US" sz="2200" dirty="0">
+              <a:ea typeface="Arial"/>
+              <a:cs typeface="Arial"/>
+              <a:sym typeface="Arial"/>
+            </a:endParaRPr>
           </a:p>
           <a:p>
             <a:pPr>
@@ -9927,49 +10553,8 @@
                 <a:cs typeface="Arial"/>
                 <a:sym typeface="Arial"/>
               </a:rPr>
-              <a:t>In that process editorial choices must be made </a:t>
-            </a:r>
-          </a:p>
-          <a:p>
-            <a:pPr>
-              <a:spcBef>
-                <a:spcPts val="0"/>
-              </a:spcBef>
-              <a:buSzPts val="2040"/>
-              <a:buFont typeface="Arial"/>
-              <a:buChar char="•"/>
-            </a:pPr>
-            <a:endParaRPr lang="en-US" sz="2400" dirty="0">
-              <a:cs typeface="Arial"/>
-              <a:sym typeface="Arial"/>
-            </a:endParaRPr>
-          </a:p>
-          <a:p>
-            <a:pPr>
-              <a:spcBef>
-                <a:spcPts val="0"/>
-              </a:spcBef>
-              <a:buSzPts val="2040"/>
-              <a:buFont typeface="Arial"/>
-              <a:buChar char="•"/>
-            </a:pPr>
-            <a:r>
-              <a:rPr lang="en-US" sz="2400" dirty="0">
-                <a:cs typeface="Arial"/>
-                <a:sym typeface="Arial"/>
-              </a:rPr>
-              <a:t>What aspects of a person’s mental model of the world might influence the editorial choices they make?</a:t>
-            </a:r>
-          </a:p>
-          <a:p>
-            <a:pPr>
-              <a:spcBef>
-                <a:spcPts val="0"/>
-              </a:spcBef>
-              <a:buSzPts val="2040"/>
-              <a:buFont typeface="Arial"/>
-              <a:buChar char="•"/>
-            </a:pPr>
+              <a:t>Persuasive Visualization  Activity </a:t>
+            </a:r>
             <a:endParaRPr lang="en-US" sz="2400" dirty="0"/>
           </a:p>
         </p:txBody>
@@ -9977,7 +10562,7 @@
     </p:spTree>
     <p:extLst>
       <p:ext uri="{BB962C8B-B14F-4D97-AF65-F5344CB8AC3E}">
-        <p14:creationId xmlns:p14="http://schemas.microsoft.com/office/powerpoint/2010/main" val="1762042930"/>
+        <p14:creationId xmlns:p14="http://schemas.microsoft.com/office/powerpoint/2010/main" val="1085546165"/>
       </p:ext>
     </p:extLst>
   </p:cSld>
@@ -10112,6 +10697,307 @@
               <a:buFont typeface="Arial"/>
               <a:buChar char="•"/>
             </a:pPr>
+            <a:endParaRPr lang="en-US" sz="2400" dirty="0"/>
+          </a:p>
+        </p:txBody>
+      </p:sp>
+    </p:spTree>
+    <p:extLst>
+      <p:ext uri="{BB962C8B-B14F-4D97-AF65-F5344CB8AC3E}">
+        <p14:creationId xmlns:p14="http://schemas.microsoft.com/office/powerpoint/2010/main" val="1739270976"/>
+      </p:ext>
+    </p:extLst>
+  </p:cSld>
+  <p:clrMapOvr>
+    <a:masterClrMapping/>
+  </p:clrMapOvr>
+</p:sld>
+</file>
+
+<file path=ppt/slides/slide6.xml><?xml version="1.0" encoding="utf-8"?>
+<p:sld xmlns:a="http://schemas.openxmlformats.org/drawingml/2006/main" xmlns:r="http://schemas.openxmlformats.org/officeDocument/2006/relationships" xmlns:p="http://schemas.openxmlformats.org/presentationml/2006/main">
+  <p:cSld>
+    <p:spTree>
+      <p:nvGrpSpPr>
+        <p:cNvPr id="1" name=""/>
+        <p:cNvGrpSpPr/>
+        <p:nvPr/>
+      </p:nvGrpSpPr>
+      <p:grpSpPr>
+        <a:xfrm>
+          <a:off x="0" y="0"/>
+          <a:ext cx="0" cy="0"/>
+          <a:chOff x="0" y="0"/>
+          <a:chExt cx="0" cy="0"/>
+        </a:xfrm>
+      </p:grpSpPr>
+      <p:sp>
+        <p:nvSpPr>
+          <p:cNvPr id="2" name="Title 1">
+            <a:extLst>
+              <a:ext uri="{FF2B5EF4-FFF2-40B4-BE49-F238E27FC236}">
+                <a16:creationId xmlns:a16="http://schemas.microsoft.com/office/drawing/2014/main" id="{10D330C2-52A4-1ABA-980B-56FBC97F350C}"/>
+              </a:ext>
+            </a:extLst>
+          </p:cNvPr>
+          <p:cNvSpPr>
+            <a:spLocks noGrp="1"/>
+          </p:cNvSpPr>
+          <p:nvPr>
+            <p:ph type="title"/>
+          </p:nvPr>
+        </p:nvSpPr>
+        <p:spPr/>
+        <p:txBody>
+          <a:bodyPr/>
+          <a:lstStyle/>
+          <a:p>
+            <a:r>
+              <a:rPr lang="en-US" dirty="0"/>
+              <a:t>Editorial Choices</a:t>
+            </a:r>
+          </a:p>
+        </p:txBody>
+      </p:sp>
+      <p:sp>
+        <p:nvSpPr>
+          <p:cNvPr id="3" name="Content Placeholder 2">
+            <a:extLst>
+              <a:ext uri="{FF2B5EF4-FFF2-40B4-BE49-F238E27FC236}">
+                <a16:creationId xmlns:a16="http://schemas.microsoft.com/office/drawing/2014/main" id="{9EAE50F6-429C-715A-C25C-1C7744AED1CF}"/>
+              </a:ext>
+            </a:extLst>
+          </p:cNvPr>
+          <p:cNvSpPr>
+            <a:spLocks noGrp="1"/>
+          </p:cNvSpPr>
+          <p:nvPr>
+            <p:ph idx="1"/>
+          </p:nvPr>
+        </p:nvSpPr>
+        <p:spPr/>
+        <p:txBody>
+          <a:bodyPr>
+            <a:normAutofit/>
+          </a:bodyPr>
+          <a:lstStyle/>
+          <a:p>
+            <a:pPr>
+              <a:spcBef>
+                <a:spcPts val="0"/>
+              </a:spcBef>
+              <a:buSzPts val="2040"/>
+              <a:buFont typeface="Arial"/>
+              <a:buChar char="•"/>
+            </a:pPr>
+            <a:r>
+              <a:rPr lang="en-US" sz="2400" dirty="0">
+                <a:ea typeface="Arial"/>
+                <a:cs typeface="Arial"/>
+                <a:sym typeface="Arial"/>
+              </a:rPr>
+              <a:t>Visualizations are created by human beings </a:t>
+            </a:r>
+          </a:p>
+          <a:p>
+            <a:pPr>
+              <a:spcBef>
+                <a:spcPts val="0"/>
+              </a:spcBef>
+              <a:buSzPts val="2040"/>
+              <a:buFont typeface="Arial"/>
+              <a:buChar char="•"/>
+            </a:pPr>
+            <a:r>
+              <a:rPr lang="en-US" sz="2400" dirty="0">
+                <a:cs typeface="Arial"/>
+                <a:sym typeface="Arial"/>
+              </a:rPr>
+              <a:t>In that process editorial choices must be made </a:t>
+            </a:r>
+          </a:p>
+          <a:p>
+            <a:pPr>
+              <a:spcBef>
+                <a:spcPts val="0"/>
+              </a:spcBef>
+              <a:buSzPts val="2040"/>
+              <a:buFont typeface="Arial"/>
+              <a:buChar char="•"/>
+            </a:pPr>
+            <a:endParaRPr lang="en-US" sz="2400" dirty="0">
+              <a:cs typeface="Arial"/>
+              <a:sym typeface="Arial"/>
+            </a:endParaRPr>
+          </a:p>
+          <a:p>
+            <a:pPr>
+              <a:spcBef>
+                <a:spcPts val="0"/>
+              </a:spcBef>
+              <a:buSzPts val="2040"/>
+              <a:buFont typeface="Arial"/>
+              <a:buChar char="•"/>
+            </a:pPr>
+            <a:r>
+              <a:rPr lang="en-US" sz="2400" dirty="0">
+                <a:cs typeface="Arial"/>
+                <a:sym typeface="Arial"/>
+              </a:rPr>
+              <a:t>What aspects of a person’s mental model of the world might influence the editorial choices they make?</a:t>
+            </a:r>
+          </a:p>
+          <a:p>
+            <a:pPr>
+              <a:spcBef>
+                <a:spcPts val="0"/>
+              </a:spcBef>
+              <a:buSzPts val="2040"/>
+              <a:buFont typeface="Arial"/>
+              <a:buChar char="•"/>
+            </a:pPr>
+            <a:endParaRPr lang="en-US" sz="2400" dirty="0"/>
+          </a:p>
+        </p:txBody>
+      </p:sp>
+    </p:spTree>
+    <p:extLst>
+      <p:ext uri="{BB962C8B-B14F-4D97-AF65-F5344CB8AC3E}">
+        <p14:creationId xmlns:p14="http://schemas.microsoft.com/office/powerpoint/2010/main" val="1762042930"/>
+      </p:ext>
+    </p:extLst>
+  </p:cSld>
+  <p:clrMapOvr>
+    <a:masterClrMapping/>
+  </p:clrMapOvr>
+</p:sld>
+</file>
+
+<file path=ppt/slides/slide7.xml><?xml version="1.0" encoding="utf-8"?>
+<p:sld xmlns:a="http://schemas.openxmlformats.org/drawingml/2006/main" xmlns:r="http://schemas.openxmlformats.org/officeDocument/2006/relationships" xmlns:p="http://schemas.openxmlformats.org/presentationml/2006/main">
+  <p:cSld>
+    <p:spTree>
+      <p:nvGrpSpPr>
+        <p:cNvPr id="1" name=""/>
+        <p:cNvGrpSpPr/>
+        <p:nvPr/>
+      </p:nvGrpSpPr>
+      <p:grpSpPr>
+        <a:xfrm>
+          <a:off x="0" y="0"/>
+          <a:ext cx="0" cy="0"/>
+          <a:chOff x="0" y="0"/>
+          <a:chExt cx="0" cy="0"/>
+        </a:xfrm>
+      </p:grpSpPr>
+      <p:sp>
+        <p:nvSpPr>
+          <p:cNvPr id="2" name="Title 1">
+            <a:extLst>
+              <a:ext uri="{FF2B5EF4-FFF2-40B4-BE49-F238E27FC236}">
+                <a16:creationId xmlns:a16="http://schemas.microsoft.com/office/drawing/2014/main" id="{10D330C2-52A4-1ABA-980B-56FBC97F350C}"/>
+              </a:ext>
+            </a:extLst>
+          </p:cNvPr>
+          <p:cNvSpPr>
+            <a:spLocks noGrp="1"/>
+          </p:cNvSpPr>
+          <p:nvPr>
+            <p:ph type="title"/>
+          </p:nvPr>
+        </p:nvSpPr>
+        <p:spPr/>
+        <p:txBody>
+          <a:bodyPr/>
+          <a:lstStyle/>
+          <a:p>
+            <a:r>
+              <a:rPr lang="en-US" dirty="0"/>
+              <a:t>Editorial Choices</a:t>
+            </a:r>
+          </a:p>
+        </p:txBody>
+      </p:sp>
+      <p:sp>
+        <p:nvSpPr>
+          <p:cNvPr id="3" name="Content Placeholder 2">
+            <a:extLst>
+              <a:ext uri="{FF2B5EF4-FFF2-40B4-BE49-F238E27FC236}">
+                <a16:creationId xmlns:a16="http://schemas.microsoft.com/office/drawing/2014/main" id="{9EAE50F6-429C-715A-C25C-1C7744AED1CF}"/>
+              </a:ext>
+            </a:extLst>
+          </p:cNvPr>
+          <p:cNvSpPr>
+            <a:spLocks noGrp="1"/>
+          </p:cNvSpPr>
+          <p:nvPr>
+            <p:ph idx="1"/>
+          </p:nvPr>
+        </p:nvSpPr>
+        <p:spPr/>
+        <p:txBody>
+          <a:bodyPr>
+            <a:normAutofit/>
+          </a:bodyPr>
+          <a:lstStyle/>
+          <a:p>
+            <a:pPr>
+              <a:spcBef>
+                <a:spcPts val="0"/>
+              </a:spcBef>
+              <a:buSzPts val="2040"/>
+              <a:buFont typeface="Arial"/>
+              <a:buChar char="•"/>
+            </a:pPr>
+            <a:r>
+              <a:rPr lang="en-US" sz="2400" dirty="0">
+                <a:ea typeface="Arial"/>
+                <a:cs typeface="Arial"/>
+                <a:sym typeface="Arial"/>
+              </a:rPr>
+              <a:t>Visualizations are created by human beings </a:t>
+            </a:r>
+          </a:p>
+          <a:p>
+            <a:pPr>
+              <a:spcBef>
+                <a:spcPts val="0"/>
+              </a:spcBef>
+              <a:buSzPts val="2040"/>
+              <a:buFont typeface="Arial"/>
+              <a:buChar char="•"/>
+            </a:pPr>
+            <a:r>
+              <a:rPr lang="en-US" sz="2400" dirty="0">
+                <a:cs typeface="Arial"/>
+                <a:sym typeface="Arial"/>
+              </a:rPr>
+              <a:t>In that process editorial choices must be made </a:t>
+            </a:r>
+          </a:p>
+          <a:p>
+            <a:pPr>
+              <a:spcBef>
+                <a:spcPts val="0"/>
+              </a:spcBef>
+              <a:buSzPts val="2040"/>
+              <a:buFont typeface="Arial"/>
+              <a:buChar char="•"/>
+            </a:pPr>
+            <a:endParaRPr lang="en-US" sz="2400" dirty="0">
+              <a:cs typeface="Arial"/>
+              <a:sym typeface="Arial"/>
+            </a:endParaRPr>
+          </a:p>
+          <a:p>
+            <a:pPr>
+              <a:spcBef>
+                <a:spcPts val="0"/>
+              </a:spcBef>
+              <a:buSzPts val="2040"/>
+              <a:buFont typeface="Arial"/>
+              <a:buChar char="•"/>
+            </a:pPr>
             <a:r>
               <a:rPr lang="en-US" sz="2400" dirty="0">
                 <a:cs typeface="Arial"/>
@@ -10177,7 +11063,7 @@
 </p:sld>
 </file>
 
-<file path=ppt/slides/slide6.xml><?xml version="1.0" encoding="utf-8"?>
+<file path=ppt/slides/slide8.xml><?xml version="1.0" encoding="utf-8"?>
 <p:sld xmlns:a="http://schemas.openxmlformats.org/drawingml/2006/main" xmlns:r="http://schemas.openxmlformats.org/officeDocument/2006/relationships" xmlns:p="http://schemas.openxmlformats.org/presentationml/2006/main">
   <p:cSld>
     <p:spTree>
@@ -10265,7 +11151,7 @@
 </p:sld>
 </file>
 
-<file path=ppt/slides/slide7.xml><?xml version="1.0" encoding="utf-8"?>
+<file path=ppt/slides/slide9.xml><?xml version="1.0" encoding="utf-8"?>
 <p:sld xmlns:a="http://schemas.openxmlformats.org/drawingml/2006/main" xmlns:r="http://schemas.openxmlformats.org/officeDocument/2006/relationships" xmlns:p="http://schemas.openxmlformats.org/presentationml/2006/main">
   <p:cSld>
     <p:spTree>
@@ -10410,704 +11296,6 @@
     <p:extLst>
       <p:ext uri="{BB962C8B-B14F-4D97-AF65-F5344CB8AC3E}">
         <p14:creationId xmlns:p14="http://schemas.microsoft.com/office/powerpoint/2010/main" val="1934589580"/>
-      </p:ext>
-    </p:extLst>
-  </p:cSld>
-  <p:clrMapOvr>
-    <a:masterClrMapping/>
-  </p:clrMapOvr>
-</p:sld>
-</file>
-
-<file path=ppt/slides/slide8.xml><?xml version="1.0" encoding="utf-8"?>
-<p:sld xmlns:a="http://schemas.openxmlformats.org/drawingml/2006/main" xmlns:r="http://schemas.openxmlformats.org/officeDocument/2006/relationships" xmlns:p="http://schemas.openxmlformats.org/presentationml/2006/main">
-  <p:cSld>
-    <p:spTree>
-      <p:nvGrpSpPr>
-        <p:cNvPr id="1" name="">
-          <a:extLst>
-            <a:ext uri="{FF2B5EF4-FFF2-40B4-BE49-F238E27FC236}">
-              <a16:creationId xmlns:a16="http://schemas.microsoft.com/office/drawing/2014/main" id="{39696472-50C9-29D4-0989-B78B94809588}"/>
-            </a:ext>
-          </a:extLst>
-        </p:cNvPr>
-        <p:cNvGrpSpPr/>
-        <p:nvPr/>
-      </p:nvGrpSpPr>
-      <p:grpSpPr>
-        <a:xfrm>
-          <a:off x="0" y="0"/>
-          <a:ext cx="0" cy="0"/>
-          <a:chOff x="0" y="0"/>
-          <a:chExt cx="0" cy="0"/>
-        </a:xfrm>
-      </p:grpSpPr>
-      <p:sp>
-        <p:nvSpPr>
-          <p:cNvPr id="2" name="Title 1">
-            <a:extLst>
-              <a:ext uri="{FF2B5EF4-FFF2-40B4-BE49-F238E27FC236}">
-                <a16:creationId xmlns:a16="http://schemas.microsoft.com/office/drawing/2014/main" id="{31DA3DF6-D7A0-0E3E-DB33-A354B106AD10}"/>
-              </a:ext>
-            </a:extLst>
-          </p:cNvPr>
-          <p:cNvSpPr>
-            <a:spLocks noGrp="1"/>
-          </p:cNvSpPr>
-          <p:nvPr>
-            <p:ph type="title"/>
-          </p:nvPr>
-        </p:nvSpPr>
-        <p:spPr/>
-        <p:txBody>
-          <a:bodyPr/>
-          <a:lstStyle/>
-          <a:p>
-            <a:r>
-              <a:rPr lang="en-US" dirty="0"/>
-              <a:t>Visualization Rhetoric</a:t>
-            </a:r>
-          </a:p>
-        </p:txBody>
-      </p:sp>
-      <p:sp>
-        <p:nvSpPr>
-          <p:cNvPr id="3" name="TextBox 2">
-            <a:extLst>
-              <a:ext uri="{FF2B5EF4-FFF2-40B4-BE49-F238E27FC236}">
-                <a16:creationId xmlns:a16="http://schemas.microsoft.com/office/drawing/2014/main" id="{718B14CE-FE70-7368-FE92-41D2F67ACA94}"/>
-              </a:ext>
-            </a:extLst>
-          </p:cNvPr>
-          <p:cNvSpPr txBox="1"/>
-          <p:nvPr/>
-        </p:nvSpPr>
-        <p:spPr>
-          <a:xfrm>
-            <a:off x="3348938" y="6336797"/>
-            <a:ext cx="8843062" cy="369332"/>
-          </a:xfrm>
-          <a:prstGeom prst="rect">
-            <a:avLst/>
-          </a:prstGeom>
-          <a:noFill/>
-        </p:spPr>
-        <p:txBody>
-          <a:bodyPr wrap="none" rtlCol="0">
-            <a:spAutoFit/>
-          </a:bodyPr>
-          <a:lstStyle/>
-          <a:p>
-            <a:r>
-              <a:rPr lang="en-US" dirty="0"/>
-              <a:t>Visualization Rhetoric: Framing Effects in Narrative Visualization; </a:t>
-            </a:r>
-            <a:r>
-              <a:rPr lang="en-US" dirty="0" err="1"/>
-              <a:t>Hullman</a:t>
-            </a:r>
-            <a:r>
-              <a:rPr lang="en-US" dirty="0"/>
-              <a:t> and </a:t>
-            </a:r>
-            <a:r>
-              <a:rPr lang="en-US" dirty="0" err="1"/>
-              <a:t>Diakopoulos</a:t>
-            </a:r>
-            <a:endParaRPr lang="en-US" dirty="0"/>
-          </a:p>
-        </p:txBody>
-      </p:sp>
-      <p:sp>
-        <p:nvSpPr>
-          <p:cNvPr id="5" name="Content Placeholder 2">
-            <a:extLst>
-              <a:ext uri="{FF2B5EF4-FFF2-40B4-BE49-F238E27FC236}">
-                <a16:creationId xmlns:a16="http://schemas.microsoft.com/office/drawing/2014/main" id="{B701B401-2ADF-C780-9BE3-49FFCF6EDC44}"/>
-              </a:ext>
-            </a:extLst>
-          </p:cNvPr>
-          <p:cNvSpPr>
-            <a:spLocks noGrp="1"/>
-          </p:cNvSpPr>
-          <p:nvPr>
-            <p:ph idx="1"/>
-          </p:nvPr>
-        </p:nvSpPr>
-        <p:spPr>
-          <a:xfrm>
-            <a:off x="3869268" y="864108"/>
-            <a:ext cx="7315200" cy="5120640"/>
-          </a:xfrm>
-        </p:spPr>
-        <p:txBody>
-          <a:bodyPr anchor="t">
-            <a:normAutofit/>
-          </a:bodyPr>
-          <a:lstStyle/>
-          <a:p>
-            <a:pPr marL="0" indent="0">
-              <a:spcBef>
-                <a:spcPts val="0"/>
-              </a:spcBef>
-              <a:buSzPts val="2040"/>
-              <a:buNone/>
-            </a:pPr>
-            <a:r>
-              <a:rPr lang="en-US" sz="2400" b="1" dirty="0"/>
-              <a:t>Editorial Layers</a:t>
-            </a:r>
-          </a:p>
-          <a:p>
-            <a:pPr marL="0" indent="0">
-              <a:spcBef>
-                <a:spcPts val="0"/>
-              </a:spcBef>
-              <a:buSzPts val="2040"/>
-              <a:buNone/>
-            </a:pPr>
-            <a:endParaRPr lang="en-US" sz="2400" dirty="0"/>
-          </a:p>
-          <a:p>
-            <a:pPr marL="457200" indent="-457200">
-              <a:spcBef>
-                <a:spcPts val="0"/>
-              </a:spcBef>
-              <a:buSzPts val="2040"/>
-              <a:buFont typeface="+mj-lt"/>
-              <a:buAutoNum type="arabicPeriod"/>
-            </a:pPr>
-            <a:r>
-              <a:rPr lang="en-US" sz="2400" dirty="0"/>
-              <a:t>The Data</a:t>
-            </a:r>
-          </a:p>
-          <a:p>
-            <a:pPr marL="457200" indent="-457200">
-              <a:spcBef>
-                <a:spcPts val="0"/>
-              </a:spcBef>
-              <a:buSzPts val="2040"/>
-              <a:buFont typeface="+mj-lt"/>
-              <a:buAutoNum type="arabicPeriod"/>
-            </a:pPr>
-            <a:endParaRPr lang="en-US" sz="2400" dirty="0"/>
-          </a:p>
-          <a:p>
-            <a:pPr marL="457200" indent="-457200">
-              <a:spcBef>
-                <a:spcPts val="0"/>
-              </a:spcBef>
-              <a:buSzPts val="2040"/>
-              <a:buFont typeface="+mj-lt"/>
-              <a:buAutoNum type="arabicPeriod"/>
-            </a:pPr>
-            <a:r>
-              <a:rPr lang="en-US" sz="2400" dirty="0"/>
-              <a:t>Visual Representation </a:t>
-            </a:r>
-          </a:p>
-          <a:p>
-            <a:pPr marL="457200" indent="-457200">
-              <a:spcBef>
-                <a:spcPts val="0"/>
-              </a:spcBef>
-              <a:buSzPts val="2040"/>
-              <a:buFont typeface="+mj-lt"/>
-              <a:buAutoNum type="arabicPeriod"/>
-            </a:pPr>
-            <a:endParaRPr lang="en-US" sz="2400" dirty="0"/>
-          </a:p>
-          <a:p>
-            <a:pPr marL="457200" indent="-457200">
-              <a:spcBef>
-                <a:spcPts val="0"/>
-              </a:spcBef>
-              <a:buSzPts val="2040"/>
-              <a:buFont typeface="+mj-lt"/>
-              <a:buAutoNum type="arabicPeriod"/>
-            </a:pPr>
-            <a:r>
-              <a:rPr lang="en-US" sz="2400" dirty="0"/>
-              <a:t>Textual Annotations </a:t>
-            </a:r>
-          </a:p>
-          <a:p>
-            <a:pPr marL="457200" indent="-457200">
-              <a:spcBef>
-                <a:spcPts val="0"/>
-              </a:spcBef>
-              <a:buSzPts val="2040"/>
-              <a:buFont typeface="+mj-lt"/>
-              <a:buAutoNum type="arabicPeriod"/>
-            </a:pPr>
-            <a:endParaRPr lang="en-US" sz="2400" dirty="0"/>
-          </a:p>
-          <a:p>
-            <a:pPr marL="457200" indent="-457200">
-              <a:spcBef>
-                <a:spcPts val="0"/>
-              </a:spcBef>
-              <a:buSzPts val="2040"/>
-              <a:buFont typeface="+mj-lt"/>
-              <a:buAutoNum type="arabicPeriod"/>
-            </a:pPr>
-            <a:r>
-              <a:rPr lang="en-US" sz="2400" dirty="0"/>
-              <a:t>Interactivity </a:t>
-            </a:r>
-          </a:p>
-        </p:txBody>
-      </p:sp>
-      <p:sp>
-        <p:nvSpPr>
-          <p:cNvPr id="4" name="Rounded Rectangle 3">
-            <a:extLst>
-              <a:ext uri="{FF2B5EF4-FFF2-40B4-BE49-F238E27FC236}">
-                <a16:creationId xmlns:a16="http://schemas.microsoft.com/office/drawing/2014/main" id="{F6C6F879-26D5-5D9C-7F2B-05C4F14381A7}"/>
-              </a:ext>
-            </a:extLst>
-          </p:cNvPr>
-          <p:cNvSpPr/>
-          <p:nvPr/>
-        </p:nvSpPr>
-        <p:spPr>
-          <a:xfrm>
-            <a:off x="3348938" y="4226189"/>
-            <a:ext cx="8602548" cy="1498831"/>
-          </a:xfrm>
-          <a:prstGeom prst="roundRect">
-            <a:avLst/>
-          </a:prstGeom>
-        </p:spPr>
-        <p:style>
-          <a:lnRef idx="0">
-            <a:schemeClr val="accent5"/>
-          </a:lnRef>
-          <a:fillRef idx="3">
-            <a:schemeClr val="accent5"/>
-          </a:fillRef>
-          <a:effectRef idx="3">
-            <a:schemeClr val="accent5"/>
-          </a:effectRef>
-          <a:fontRef idx="minor">
-            <a:schemeClr val="lt1"/>
-          </a:fontRef>
-        </p:style>
-        <p:txBody>
-          <a:bodyPr rtlCol="0" anchor="ctr"/>
-          <a:lstStyle/>
-          <a:p>
-            <a:pPr algn="ctr"/>
-            <a:r>
-              <a:rPr lang="en-US" sz="2400" dirty="0"/>
-              <a:t>ID one editorial decision to be made in each layer. How might that decision affect the takeaway message of the visualization? </a:t>
-            </a:r>
-          </a:p>
-        </p:txBody>
-      </p:sp>
-    </p:spTree>
-    <p:extLst>
-      <p:ext uri="{BB962C8B-B14F-4D97-AF65-F5344CB8AC3E}">
-        <p14:creationId xmlns:p14="http://schemas.microsoft.com/office/powerpoint/2010/main" val="2891675586"/>
-      </p:ext>
-    </p:extLst>
-  </p:cSld>
-  <p:clrMapOvr>
-    <a:masterClrMapping/>
-  </p:clrMapOvr>
-  <p:timing>
-    <p:tnLst>
-      <p:par>
-        <p:cTn id="1" dur="indefinite" restart="never" nodeType="tmRoot">
-          <p:childTnLst>
-            <p:seq concurrent="1" nextAc="seek">
-              <p:cTn id="2" dur="indefinite" nodeType="mainSeq">
-                <p:childTnLst>
-                  <p:par>
-                    <p:cTn id="3" fill="hold">
-                      <p:stCondLst>
-                        <p:cond delay="indefinite"/>
-                      </p:stCondLst>
-                      <p:childTnLst>
-                        <p:par>
-                          <p:cTn id="4" fill="hold">
-                            <p:stCondLst>
-                              <p:cond delay="0"/>
-                            </p:stCondLst>
-                            <p:childTnLst>
-                              <p:par>
-                                <p:cTn id="5" presetID="1" presetClass="entr" presetSubtype="0" fill="hold" grpId="0" nodeType="clickEffect">
-                                  <p:stCondLst>
-                                    <p:cond delay="0"/>
-                                  </p:stCondLst>
-                                  <p:childTnLst>
-                                    <p:set>
-                                      <p:cBhvr>
-                                        <p:cTn id="6" dur="1" fill="hold">
-                                          <p:stCondLst>
-                                            <p:cond delay="0"/>
-                                          </p:stCondLst>
-                                        </p:cTn>
-                                        <p:tgtEl>
-                                          <p:spTgt spid="4"/>
-                                        </p:tgtEl>
-                                        <p:attrNameLst>
-                                          <p:attrName>style.visibility</p:attrName>
-                                        </p:attrNameLst>
-                                      </p:cBhvr>
-                                      <p:to>
-                                        <p:strVal val="visible"/>
-                                      </p:to>
-                                    </p:set>
-                                  </p:childTnLst>
-                                </p:cTn>
-                              </p:par>
-                            </p:childTnLst>
-                          </p:cTn>
-                        </p:par>
-                      </p:childTnLst>
-                    </p:cTn>
-                  </p:par>
-                </p:childTnLst>
-              </p:cTn>
-              <p:prevCondLst>
-                <p:cond evt="onPrev" delay="0">
-                  <p:tgtEl>
-                    <p:sldTgt/>
-                  </p:tgtEl>
-                </p:cond>
-              </p:prevCondLst>
-              <p:nextCondLst>
-                <p:cond evt="onNext" delay="0">
-                  <p:tgtEl>
-                    <p:sldTgt/>
-                  </p:tgtEl>
-                </p:cond>
-              </p:nextCondLst>
-            </p:seq>
-          </p:childTnLst>
-        </p:cTn>
-      </p:par>
-    </p:tnLst>
-    <p:bldLst>
-      <p:bldP spid="4" grpId="0" animBg="1"/>
-    </p:bldLst>
-  </p:timing>
-</p:sld>
-</file>
-
-<file path=ppt/slides/slide9.xml><?xml version="1.0" encoding="utf-8"?>
-<p:sld xmlns:a="http://schemas.openxmlformats.org/drawingml/2006/main" xmlns:r="http://schemas.openxmlformats.org/officeDocument/2006/relationships" xmlns:p="http://schemas.openxmlformats.org/presentationml/2006/main">
-  <p:cSld>
-    <p:spTree>
-      <p:nvGrpSpPr>
-        <p:cNvPr id="1" name="">
-          <a:extLst>
-            <a:ext uri="{FF2B5EF4-FFF2-40B4-BE49-F238E27FC236}">
-              <a16:creationId xmlns:a16="http://schemas.microsoft.com/office/drawing/2014/main" id="{EBE6C9A6-51AC-857D-A8B3-07C5BA520C42}"/>
-            </a:ext>
-          </a:extLst>
-        </p:cNvPr>
-        <p:cNvGrpSpPr/>
-        <p:nvPr/>
-      </p:nvGrpSpPr>
-      <p:grpSpPr>
-        <a:xfrm>
-          <a:off x="0" y="0"/>
-          <a:ext cx="0" cy="0"/>
-          <a:chOff x="0" y="0"/>
-          <a:chExt cx="0" cy="0"/>
-        </a:xfrm>
-      </p:grpSpPr>
-      <p:sp>
-        <p:nvSpPr>
-          <p:cNvPr id="2" name="Title 1">
-            <a:extLst>
-              <a:ext uri="{FF2B5EF4-FFF2-40B4-BE49-F238E27FC236}">
-                <a16:creationId xmlns:a16="http://schemas.microsoft.com/office/drawing/2014/main" id="{13C2CC2F-B619-8C24-3E10-B026E8F2BFCF}"/>
-              </a:ext>
-            </a:extLst>
-          </p:cNvPr>
-          <p:cNvSpPr>
-            <a:spLocks noGrp="1"/>
-          </p:cNvSpPr>
-          <p:nvPr>
-            <p:ph type="title"/>
-          </p:nvPr>
-        </p:nvSpPr>
-        <p:spPr/>
-        <p:txBody>
-          <a:bodyPr/>
-          <a:lstStyle/>
-          <a:p>
-            <a:r>
-              <a:rPr lang="en-US" dirty="0"/>
-              <a:t>Visualization Rhetoric Techniques</a:t>
-            </a:r>
-          </a:p>
-        </p:txBody>
-      </p:sp>
-      <p:sp>
-        <p:nvSpPr>
-          <p:cNvPr id="3" name="TextBox 2">
-            <a:extLst>
-              <a:ext uri="{FF2B5EF4-FFF2-40B4-BE49-F238E27FC236}">
-                <a16:creationId xmlns:a16="http://schemas.microsoft.com/office/drawing/2014/main" id="{0E024E04-B943-3294-8C8C-7225B67B050D}"/>
-              </a:ext>
-            </a:extLst>
-          </p:cNvPr>
-          <p:cNvSpPr txBox="1"/>
-          <p:nvPr/>
-        </p:nvSpPr>
-        <p:spPr>
-          <a:xfrm>
-            <a:off x="3348938" y="6336797"/>
-            <a:ext cx="8843062" cy="369332"/>
-          </a:xfrm>
-          <a:prstGeom prst="rect">
-            <a:avLst/>
-          </a:prstGeom>
-          <a:noFill/>
-        </p:spPr>
-        <p:txBody>
-          <a:bodyPr wrap="none" rtlCol="0">
-            <a:spAutoFit/>
-          </a:bodyPr>
-          <a:lstStyle/>
-          <a:p>
-            <a:r>
-              <a:rPr lang="en-US" dirty="0"/>
-              <a:t>Visualization Rhetoric: Framing Effects in Narrative Visualization; </a:t>
-            </a:r>
-            <a:r>
-              <a:rPr lang="en-US" dirty="0" err="1"/>
-              <a:t>Hullman</a:t>
-            </a:r>
-            <a:r>
-              <a:rPr lang="en-US" dirty="0"/>
-              <a:t> and </a:t>
-            </a:r>
-            <a:r>
-              <a:rPr lang="en-US" dirty="0" err="1"/>
-              <a:t>Diakopoulos</a:t>
-            </a:r>
-            <a:endParaRPr lang="en-US" dirty="0"/>
-          </a:p>
-        </p:txBody>
-      </p:sp>
-      <p:sp>
-        <p:nvSpPr>
-          <p:cNvPr id="5" name="Content Placeholder 2">
-            <a:extLst>
-              <a:ext uri="{FF2B5EF4-FFF2-40B4-BE49-F238E27FC236}">
-                <a16:creationId xmlns:a16="http://schemas.microsoft.com/office/drawing/2014/main" id="{F07CA44E-0D23-3E57-7BE6-F6E91C87BC69}"/>
-              </a:ext>
-            </a:extLst>
-          </p:cNvPr>
-          <p:cNvSpPr>
-            <a:spLocks noGrp="1"/>
-          </p:cNvSpPr>
-          <p:nvPr>
-            <p:ph idx="1"/>
-          </p:nvPr>
-        </p:nvSpPr>
-        <p:spPr>
-          <a:xfrm>
-            <a:off x="3817509" y="432787"/>
-            <a:ext cx="7315200" cy="5120640"/>
-          </a:xfrm>
-        </p:spPr>
-        <p:txBody>
-          <a:bodyPr anchor="t">
-            <a:noAutofit/>
-          </a:bodyPr>
-          <a:lstStyle/>
-          <a:p>
-            <a:pPr marL="0" indent="0">
-              <a:spcBef>
-                <a:spcPts val="0"/>
-              </a:spcBef>
-              <a:buSzPts val="2040"/>
-              <a:buNone/>
-            </a:pPr>
-            <a:r>
-              <a:rPr lang="en-US" sz="2400" b="1" dirty="0"/>
-              <a:t>Information Access Rhetoric </a:t>
-            </a:r>
-          </a:p>
-          <a:p>
-            <a:pPr marL="0" indent="0">
-              <a:spcBef>
-                <a:spcPts val="0"/>
-              </a:spcBef>
-              <a:buSzPts val="2040"/>
-              <a:buNone/>
-            </a:pPr>
-            <a:endParaRPr lang="en-US" sz="2400" b="1" dirty="0"/>
-          </a:p>
-          <a:p>
-            <a:pPr>
-              <a:spcBef>
-                <a:spcPts val="0"/>
-              </a:spcBef>
-              <a:buSzPts val="2040"/>
-            </a:pPr>
-            <a:r>
-              <a:rPr lang="en-US" sz="2400" dirty="0"/>
-              <a:t>Omission </a:t>
-            </a:r>
-          </a:p>
-          <a:p>
-            <a:pPr lvl="1">
-              <a:spcBef>
-                <a:spcPts val="0"/>
-              </a:spcBef>
-              <a:buSzPts val="2040"/>
-            </a:pPr>
-            <a:r>
-              <a:rPr lang="en-US" sz="2400" dirty="0"/>
-              <a:t>Neglecting to cite data sources </a:t>
-            </a:r>
-          </a:p>
-          <a:p>
-            <a:pPr lvl="1">
-              <a:spcBef>
-                <a:spcPts val="0"/>
-              </a:spcBef>
-              <a:buSzPts val="2040"/>
-            </a:pPr>
-            <a:r>
-              <a:rPr lang="en-US" sz="2400" dirty="0"/>
-              <a:t>Defining variables ambiguously </a:t>
-            </a:r>
-          </a:p>
-          <a:p>
-            <a:pPr lvl="1">
-              <a:spcBef>
-                <a:spcPts val="0"/>
-              </a:spcBef>
-              <a:buSzPts val="2040"/>
-            </a:pPr>
-            <a:r>
-              <a:rPr lang="en-US" sz="2400" dirty="0"/>
-              <a:t>Knowledge assumptions of the end-user </a:t>
-            </a:r>
-          </a:p>
-          <a:p>
-            <a:pPr lvl="1">
-              <a:spcBef>
-                <a:spcPts val="0"/>
-              </a:spcBef>
-              <a:buSzPts val="2040"/>
-            </a:pPr>
-            <a:r>
-              <a:rPr lang="en-US" sz="2400" dirty="0"/>
-              <a:t>Thresholding values </a:t>
-            </a:r>
-          </a:p>
-          <a:p>
-            <a:pPr lvl="1">
-              <a:spcBef>
-                <a:spcPts val="0"/>
-              </a:spcBef>
-              <a:buSzPts val="2040"/>
-            </a:pPr>
-            <a:r>
-              <a:rPr lang="en-US" sz="2400" dirty="0"/>
-              <a:t>Omitting exceptional cases </a:t>
-            </a:r>
-          </a:p>
-          <a:p>
-            <a:pPr lvl="1">
-              <a:spcBef>
-                <a:spcPts val="0"/>
-              </a:spcBef>
-              <a:buSzPts val="2040"/>
-            </a:pPr>
-            <a:r>
-              <a:rPr lang="en-US" sz="2400" dirty="0"/>
-              <a:t>Thresholding axes </a:t>
-            </a:r>
-          </a:p>
-          <a:p>
-            <a:pPr lvl="1">
-              <a:spcBef>
-                <a:spcPts val="0"/>
-              </a:spcBef>
-              <a:buSzPts val="2040"/>
-            </a:pPr>
-            <a:r>
-              <a:rPr lang="en-US" sz="2400" dirty="0"/>
-              <a:t>Filtering</a:t>
-            </a:r>
-          </a:p>
-          <a:p>
-            <a:pPr>
-              <a:spcBef>
-                <a:spcPts val="0"/>
-              </a:spcBef>
-              <a:buSzPts val="2040"/>
-            </a:pPr>
-            <a:r>
-              <a:rPr lang="en-US" sz="2400" dirty="0"/>
-              <a:t>Metonymy (techniques the require part-to-whole relationships)</a:t>
-            </a:r>
-          </a:p>
-          <a:p>
-            <a:pPr lvl="1">
-              <a:spcBef>
-                <a:spcPts val="0"/>
-              </a:spcBef>
-              <a:buSzPts val="2040"/>
-            </a:pPr>
-            <a:r>
-              <a:rPr lang="en-US" sz="2400" dirty="0"/>
-              <a:t>Selection of variables </a:t>
-            </a:r>
-          </a:p>
-          <a:p>
-            <a:pPr lvl="1">
-              <a:spcBef>
-                <a:spcPts val="0"/>
-              </a:spcBef>
-              <a:buSzPts val="2040"/>
-            </a:pPr>
-            <a:r>
-              <a:rPr lang="en-US" sz="2400" dirty="0"/>
-              <a:t>Averaging </a:t>
-            </a:r>
-          </a:p>
-          <a:p>
-            <a:pPr lvl="1">
-              <a:spcBef>
-                <a:spcPts val="0"/>
-              </a:spcBef>
-              <a:buSzPts val="2040"/>
-            </a:pPr>
-            <a:r>
-              <a:rPr lang="en-US" sz="2400" dirty="0"/>
-              <a:t>Textual and visual summaries </a:t>
-            </a:r>
-          </a:p>
-          <a:p>
-            <a:pPr lvl="1">
-              <a:spcBef>
-                <a:spcPts val="0"/>
-              </a:spcBef>
-              <a:buSzPts val="2040"/>
-            </a:pPr>
-            <a:r>
-              <a:rPr lang="en-US" sz="2400" dirty="0"/>
-              <a:t>Categorizing, binning, or aggregating </a:t>
-            </a:r>
-          </a:p>
-        </p:txBody>
-      </p:sp>
-    </p:spTree>
-    <p:extLst>
-      <p:ext uri="{BB962C8B-B14F-4D97-AF65-F5344CB8AC3E}">
-        <p14:creationId xmlns:p14="http://schemas.microsoft.com/office/powerpoint/2010/main" val="3683809271"/>
       </p:ext>
     </p:extLst>
   </p:cSld>

--- a/slides/09-persuasive-vis.pptx
+++ b/slides/09-persuasive-vis.pptx
@@ -221,7 +221,7 @@
           <a:p>
             <a:fld id="{3CBB8A52-8AC5-C74C-97FB-632C448F3674}" type="datetimeFigureOut">
               <a:rPr lang="en-US" smtClean="0"/>
-              <a:t>9/30/26</a:t>
+              <a:t>10/23/26</a:t>
             </a:fld>
             <a:endParaRPr lang="en-US"/>
           </a:p>
@@ -2819,7 +2819,7 @@
             <a:fld id="{5586B75A-687E-405C-8A0B-8D00578BA2C3}" type="datetimeFigureOut">
               <a:rPr lang="en-US" smtClean="0"/>
               <a:pPr/>
-              <a:t>9/30/26</a:t>
+              <a:t>10/23/26</a:t>
             </a:fld>
             <a:endParaRPr lang="en-US" dirty="0"/>
           </a:p>
@@ -2991,7 +2991,7 @@
             <a:fld id="{5586B75A-687E-405C-8A0B-8D00578BA2C3}" type="datetimeFigureOut">
               <a:rPr lang="en-US" smtClean="0"/>
               <a:pPr/>
-              <a:t>9/30/26</a:t>
+              <a:t>10/23/26</a:t>
             </a:fld>
             <a:endParaRPr lang="en-US" dirty="0"/>
           </a:p>
@@ -3173,7 +3173,7 @@
             <a:fld id="{5586B75A-687E-405C-8A0B-8D00578BA2C3}" type="datetimeFigureOut">
               <a:rPr lang="en-US" smtClean="0"/>
               <a:pPr/>
-              <a:t>9/30/26</a:t>
+              <a:t>10/23/26</a:t>
             </a:fld>
             <a:endParaRPr lang="en-US" dirty="0"/>
           </a:p>
@@ -3345,7 +3345,7 @@
             <a:fld id="{5586B75A-687E-405C-8A0B-8D00578BA2C3}" type="datetimeFigureOut">
               <a:rPr lang="en-US" smtClean="0"/>
               <a:pPr/>
-              <a:t>9/30/26</a:t>
+              <a:t>10/23/26</a:t>
             </a:fld>
             <a:endParaRPr lang="en-US" dirty="0"/>
           </a:p>
@@ -3601,7 +3601,7 @@
             <a:fld id="{5586B75A-687E-405C-8A0B-8D00578BA2C3}" type="datetimeFigureOut">
               <a:rPr lang="en-US" smtClean="0"/>
               <a:pPr/>
-              <a:t>9/30/26</a:t>
+              <a:t>10/23/26</a:t>
             </a:fld>
             <a:endParaRPr lang="en-US" dirty="0"/>
           </a:p>
@@ -3891,7 +3891,7 @@
             <a:fld id="{5586B75A-687E-405C-8A0B-8D00578BA2C3}" type="datetimeFigureOut">
               <a:rPr lang="en-US" smtClean="0"/>
               <a:pPr/>
-              <a:t>9/30/26</a:t>
+              <a:t>10/23/26</a:t>
             </a:fld>
             <a:endParaRPr lang="en-US" dirty="0"/>
           </a:p>
@@ -4335,7 +4335,7 @@
             <a:fld id="{5586B75A-687E-405C-8A0B-8D00578BA2C3}" type="datetimeFigureOut">
               <a:rPr lang="en-US" smtClean="0"/>
               <a:pPr/>
-              <a:t>9/30/26</a:t>
+              <a:t>10/23/26</a:t>
             </a:fld>
             <a:endParaRPr lang="en-US" dirty="0"/>
           </a:p>
@@ -4455,7 +4455,7 @@
             <a:fld id="{5586B75A-687E-405C-8A0B-8D00578BA2C3}" type="datetimeFigureOut">
               <a:rPr lang="en-US" smtClean="0"/>
               <a:pPr/>
-              <a:t>9/30/26</a:t>
+              <a:t>10/23/26</a:t>
             </a:fld>
             <a:endParaRPr lang="en-US" dirty="0"/>
           </a:p>
@@ -4552,7 +4552,7 @@
             <a:fld id="{5586B75A-687E-405C-8A0B-8D00578BA2C3}" type="datetimeFigureOut">
               <a:rPr lang="en-US" smtClean="0"/>
               <a:pPr/>
-              <a:t>9/30/26</a:t>
+              <a:t>10/23/26</a:t>
             </a:fld>
             <a:endParaRPr lang="en-US" dirty="0"/>
           </a:p>
@@ -4842,7 +4842,7 @@
             <a:fld id="{5586B75A-687E-405C-8A0B-8D00578BA2C3}" type="datetimeFigureOut">
               <a:rPr lang="en-US" smtClean="0"/>
               <a:pPr/>
-              <a:t>9/30/26</a:t>
+              <a:t>10/23/26</a:t>
             </a:fld>
             <a:endParaRPr lang="en-US" dirty="0"/>
           </a:p>
@@ -5117,7 +5117,7 @@
             <a:fld id="{5586B75A-687E-405C-8A0B-8D00578BA2C3}" type="datetimeFigureOut">
               <a:rPr lang="en-US" smtClean="0"/>
               <a:pPr/>
-              <a:t>9/30/26</a:t>
+              <a:t>10/23/26</a:t>
             </a:fld>
             <a:endParaRPr lang="en-US" dirty="0"/>
           </a:p>
@@ -5430,7 +5430,7 @@
             <a:fld id="{5586B75A-687E-405C-8A0B-8D00578BA2C3}" type="datetimeFigureOut">
               <a:rPr lang="en-US" smtClean="0"/>
               <a:pPr/>
-              <a:t>9/30/26</a:t>
+              <a:t>10/23/26</a:t>
             </a:fld>
             <a:endParaRPr lang="en-US" dirty="0"/>
           </a:p>

--- a/slides/09-persuasive-vis.pptx
+++ b/slides/09-persuasive-vis.pptx
@@ -221,7 +221,7 @@
           <a:p>
             <a:fld id="{3CBB8A52-8AC5-C74C-97FB-632C448F3674}" type="datetimeFigureOut">
               <a:rPr lang="en-US" smtClean="0"/>
-              <a:t>10/23/26</a:t>
+              <a:t>10/26/26</a:t>
             </a:fld>
             <a:endParaRPr lang="en-US"/>
           </a:p>
@@ -1435,10 +1435,9 @@
           </a:p>
           <a:p>
             <a:r>
-              <a:rPr lang="en-US"/>
+              <a:rPr lang="en-US" dirty="0"/>
               <a:t>behave, is when the designer wants the audience to act in ways consistent with the desired belief</a:t>
             </a:r>
-            <a:endParaRPr lang="en-US" dirty="0"/>
           </a:p>
         </p:txBody>
       </p:sp>
@@ -2819,7 +2818,7 @@
             <a:fld id="{5586B75A-687E-405C-8A0B-8D00578BA2C3}" type="datetimeFigureOut">
               <a:rPr lang="en-US" smtClean="0"/>
               <a:pPr/>
-              <a:t>10/23/26</a:t>
+              <a:t>10/26/26</a:t>
             </a:fld>
             <a:endParaRPr lang="en-US" dirty="0"/>
           </a:p>
@@ -2991,7 +2990,7 @@
             <a:fld id="{5586B75A-687E-405C-8A0B-8D00578BA2C3}" type="datetimeFigureOut">
               <a:rPr lang="en-US" smtClean="0"/>
               <a:pPr/>
-              <a:t>10/23/26</a:t>
+              <a:t>10/26/26</a:t>
             </a:fld>
             <a:endParaRPr lang="en-US" dirty="0"/>
           </a:p>
@@ -3173,7 +3172,7 @@
             <a:fld id="{5586B75A-687E-405C-8A0B-8D00578BA2C3}" type="datetimeFigureOut">
               <a:rPr lang="en-US" smtClean="0"/>
               <a:pPr/>
-              <a:t>10/23/26</a:t>
+              <a:t>10/26/26</a:t>
             </a:fld>
             <a:endParaRPr lang="en-US" dirty="0"/>
           </a:p>
@@ -3345,7 +3344,7 @@
             <a:fld id="{5586B75A-687E-405C-8A0B-8D00578BA2C3}" type="datetimeFigureOut">
               <a:rPr lang="en-US" smtClean="0"/>
               <a:pPr/>
-              <a:t>10/23/26</a:t>
+              <a:t>10/26/26</a:t>
             </a:fld>
             <a:endParaRPr lang="en-US" dirty="0"/>
           </a:p>
@@ -3601,7 +3600,7 @@
             <a:fld id="{5586B75A-687E-405C-8A0B-8D00578BA2C3}" type="datetimeFigureOut">
               <a:rPr lang="en-US" smtClean="0"/>
               <a:pPr/>
-              <a:t>10/23/26</a:t>
+              <a:t>10/26/26</a:t>
             </a:fld>
             <a:endParaRPr lang="en-US" dirty="0"/>
           </a:p>
@@ -3891,7 +3890,7 @@
             <a:fld id="{5586B75A-687E-405C-8A0B-8D00578BA2C3}" type="datetimeFigureOut">
               <a:rPr lang="en-US" smtClean="0"/>
               <a:pPr/>
-              <a:t>10/23/26</a:t>
+              <a:t>10/26/26</a:t>
             </a:fld>
             <a:endParaRPr lang="en-US" dirty="0"/>
           </a:p>
@@ -4335,7 +4334,7 @@
             <a:fld id="{5586B75A-687E-405C-8A0B-8D00578BA2C3}" type="datetimeFigureOut">
               <a:rPr lang="en-US" smtClean="0"/>
               <a:pPr/>
-              <a:t>10/23/26</a:t>
+              <a:t>10/26/26</a:t>
             </a:fld>
             <a:endParaRPr lang="en-US" dirty="0"/>
           </a:p>
@@ -4455,7 +4454,7 @@
             <a:fld id="{5586B75A-687E-405C-8A0B-8D00578BA2C3}" type="datetimeFigureOut">
               <a:rPr lang="en-US" smtClean="0"/>
               <a:pPr/>
-              <a:t>10/23/26</a:t>
+              <a:t>10/26/26</a:t>
             </a:fld>
             <a:endParaRPr lang="en-US" dirty="0"/>
           </a:p>
@@ -4552,7 +4551,7 @@
             <a:fld id="{5586B75A-687E-405C-8A0B-8D00578BA2C3}" type="datetimeFigureOut">
               <a:rPr lang="en-US" smtClean="0"/>
               <a:pPr/>
-              <a:t>10/23/26</a:t>
+              <a:t>10/26/26</a:t>
             </a:fld>
             <a:endParaRPr lang="en-US" dirty="0"/>
           </a:p>
@@ -4842,7 +4841,7 @@
             <a:fld id="{5586B75A-687E-405C-8A0B-8D00578BA2C3}" type="datetimeFigureOut">
               <a:rPr lang="en-US" smtClean="0"/>
               <a:pPr/>
-              <a:t>10/23/26</a:t>
+              <a:t>10/26/26</a:t>
             </a:fld>
             <a:endParaRPr lang="en-US" dirty="0"/>
           </a:p>
@@ -5117,7 +5116,7 @@
             <a:fld id="{5586B75A-687E-405C-8A0B-8D00578BA2C3}" type="datetimeFigureOut">
               <a:rPr lang="en-US" smtClean="0"/>
               <a:pPr/>
-              <a:t>10/23/26</a:t>
+              <a:t>10/26/26</a:t>
             </a:fld>
             <a:endParaRPr lang="en-US" dirty="0"/>
           </a:p>
@@ -5430,7 +5429,7 @@
             <a:fld id="{5586B75A-687E-405C-8A0B-8D00578BA2C3}" type="datetimeFigureOut">
               <a:rPr lang="en-US" smtClean="0"/>
               <a:pPr/>
-              <a:t>10/23/26</a:t>
+              <a:t>10/26/26</a:t>
             </a:fld>
             <a:endParaRPr lang="en-US" dirty="0"/>
           </a:p>
@@ -9223,8 +9222,55 @@
         </p:nvSpPr>
         <p:spPr>
           <a:xfrm>
-            <a:off x="4108736" y="1439056"/>
-            <a:ext cx="3371356" cy="4107305"/>
+            <a:off x="5271507" y="1624186"/>
+            <a:ext cx="2225252" cy="3691554"/>
+          </a:xfrm>
+          <a:prstGeom prst="rect">
+            <a:avLst/>
+          </a:prstGeom>
+          <a:ln>
+            <a:noFill/>
+          </a:ln>
+        </p:spPr>
+        <p:style>
+          <a:lnRef idx="2">
+            <a:schemeClr val="accent6"/>
+          </a:lnRef>
+          <a:fillRef idx="1">
+            <a:schemeClr val="lt1"/>
+          </a:fillRef>
+          <a:effectRef idx="0">
+            <a:schemeClr val="accent6"/>
+          </a:effectRef>
+          <a:fontRef idx="minor">
+            <a:schemeClr val="dk1"/>
+          </a:fontRef>
+        </p:style>
+        <p:txBody>
+          <a:bodyPr rtlCol="0" anchor="ctr"/>
+          <a:lstStyle/>
+          <a:p>
+            <a:pPr algn="ctr"/>
+            <a:endParaRPr lang="en-US"/>
+          </a:p>
+        </p:txBody>
+      </p:sp>
+      <p:sp>
+        <p:nvSpPr>
+          <p:cNvPr id="4" name="Rectangle 3">
+            <a:extLst>
+              <a:ext uri="{FF2B5EF4-FFF2-40B4-BE49-F238E27FC236}">
+                <a16:creationId xmlns:a16="http://schemas.microsoft.com/office/drawing/2014/main" id="{E7C4B503-DF7B-5291-7F68-915CBF406C2D}"/>
+              </a:ext>
+            </a:extLst>
+          </p:cNvPr>
+          <p:cNvSpPr/>
+          <p:nvPr/>
+        </p:nvSpPr>
+        <p:spPr>
+          <a:xfrm>
+            <a:off x="7526633" y="1578650"/>
+            <a:ext cx="2718659" cy="3737089"/>
           </a:xfrm>
           <a:prstGeom prst="rect">
             <a:avLst/>
@@ -9341,24 +9387,56 @@
                                 </p:cTn>
                               </p:par>
                               <p:par>
-                                <p:cTn id="9" presetID="0" presetClass="path" presetSubtype="0" accel="50000" decel="50000" fill="hold" grpId="0" nodeType="withEffect">
+                                <p:cTn id="9" presetID="1" presetClass="exit" presetSubtype="0" fill="hold" grpId="0" nodeType="withEffect">
                                   <p:stCondLst>
                                     <p:cond delay="0"/>
                                   </p:stCondLst>
                                   <p:childTnLst>
-                                    <p:animMotion origin="layout" path="M -4.16667E-7 7.40741E-7 L 0.26068 -0.00926 " pathEditMode="relative" rAng="0" ptsTypes="AA">
+                                    <p:set>
                                       <p:cBhvr>
-                                        <p:cTn id="10" dur="10" fill="hold"/>
+                                        <p:cTn id="10" dur="1" fill="hold">
+                                          <p:stCondLst>
+                                            <p:cond delay="0"/>
+                                          </p:stCondLst>
+                                        </p:cTn>
                                         <p:tgtEl>
                                           <p:spTgt spid="3"/>
                                         </p:tgtEl>
                                         <p:attrNameLst>
-                                          <p:attrName>ppt_x</p:attrName>
-                                          <p:attrName>ppt_y</p:attrName>
+                                          <p:attrName>style.visibility</p:attrName>
                                         </p:attrNameLst>
                                       </p:cBhvr>
-                                      <p:rCtr x="13034" y="-463"/>
-                                    </p:animMotion>
+                                      <p:to>
+                                        <p:strVal val="hidden"/>
+                                      </p:to>
+                                    </p:set>
+                                  </p:childTnLst>
+                                </p:cTn>
+                              </p:par>
+                              <p:par>
+                                <p:cTn id="11" presetID="1" presetClass="entr" presetSubtype="0" fill="hold" grpId="0" nodeType="withEffect">
+                                  <p:stCondLst>
+                                    <p:cond delay="0"/>
+                                  </p:stCondLst>
+                                  <p:childTnLst>
+                                    <p:set>
+                                      <p:cBhvr>
+                                        <p:cTn id="12" dur="1" fill="hold">
+                                          <p:stCondLst>
+                                            <p:cond delay="0"/>
+                                          </p:stCondLst>
+                                        </p:cTn>
+                                        <p:tgtEl>
+                                          <p:spTgt spid="4"/>
+                                        </p:tgtEl>
+                                        <p:attrNameLst>
+                                          <p:attrName>style.visibility</p:attrName>
+                                        </p:attrNameLst>
+                                      </p:cBhvr>
+                                      <p:to>
+                                        <p:strVal val="visible"/>
+                                      </p:to>
+                                    </p:set>
                                   </p:childTnLst>
                                 </p:cTn>
                               </p:par>
@@ -9393,6 +9471,7 @@
       <p:bldP spid="8" grpId="0"/>
       <p:bldP spid="10" grpId="0"/>
       <p:bldP spid="3" grpId="0" animBg="1"/>
+      <p:bldP spid="4" grpId="0" animBg="1"/>
     </p:bldLst>
   </p:timing>
 </p:sld>
@@ -11034,7 +11113,7 @@
                 <a:cs typeface="Arial"/>
                 <a:sym typeface="Arial"/>
               </a:rPr>
-              <a:t>What is the difference between bias and subject matter expertise??</a:t>
+              <a:t>What is the difference between bias and subject matter expertise?</a:t>
             </a:r>
           </a:p>
           <a:p>
